--- a/DB산출물/05_ERD.pptx
+++ b/DB산출물/05_ERD.pptx
@@ -260,7 +260,7 @@
           <a:p>
             <a:fld id="{C6EE36B7-F0BA-4AB3-BD67-20AC5E002CC9}" type="datetimeFigureOut">
               <a:rPr lang="ko-KR" altLang="en-US" smtClean="0"/>
-              <a:t>2026-05-14</a:t>
+              <a:t>2026-05-15</a:t>
             </a:fld>
             <a:endParaRPr lang="ko-KR" altLang="en-US"/>
           </a:p>
@@ -458,7 +458,7 @@
           <a:p>
             <a:fld id="{C6EE36B7-F0BA-4AB3-BD67-20AC5E002CC9}" type="datetimeFigureOut">
               <a:rPr lang="ko-KR" altLang="en-US" smtClean="0"/>
-              <a:t>2026-05-14</a:t>
+              <a:t>2026-05-15</a:t>
             </a:fld>
             <a:endParaRPr lang="ko-KR" altLang="en-US"/>
           </a:p>
@@ -666,7 +666,7 @@
           <a:p>
             <a:fld id="{C6EE36B7-F0BA-4AB3-BD67-20AC5E002CC9}" type="datetimeFigureOut">
               <a:rPr lang="ko-KR" altLang="en-US" smtClean="0"/>
-              <a:t>2026-05-14</a:t>
+              <a:t>2026-05-15</a:t>
             </a:fld>
             <a:endParaRPr lang="ko-KR" altLang="en-US"/>
           </a:p>
@@ -864,7 +864,7 @@
           <a:p>
             <a:fld id="{C6EE36B7-F0BA-4AB3-BD67-20AC5E002CC9}" type="datetimeFigureOut">
               <a:rPr lang="ko-KR" altLang="en-US" smtClean="0"/>
-              <a:t>2026-05-14</a:t>
+              <a:t>2026-05-15</a:t>
             </a:fld>
             <a:endParaRPr lang="ko-KR" altLang="en-US"/>
           </a:p>
@@ -1139,7 +1139,7 @@
           <a:p>
             <a:fld id="{C6EE36B7-F0BA-4AB3-BD67-20AC5E002CC9}" type="datetimeFigureOut">
               <a:rPr lang="ko-KR" altLang="en-US" smtClean="0"/>
-              <a:t>2026-05-14</a:t>
+              <a:t>2026-05-15</a:t>
             </a:fld>
             <a:endParaRPr lang="ko-KR" altLang="en-US"/>
           </a:p>
@@ -1404,7 +1404,7 @@
           <a:p>
             <a:fld id="{C6EE36B7-F0BA-4AB3-BD67-20AC5E002CC9}" type="datetimeFigureOut">
               <a:rPr lang="ko-KR" altLang="en-US" smtClean="0"/>
-              <a:t>2026-05-14</a:t>
+              <a:t>2026-05-15</a:t>
             </a:fld>
             <a:endParaRPr lang="ko-KR" altLang="en-US"/>
           </a:p>
@@ -1816,7 +1816,7 @@
           <a:p>
             <a:fld id="{C6EE36B7-F0BA-4AB3-BD67-20AC5E002CC9}" type="datetimeFigureOut">
               <a:rPr lang="ko-KR" altLang="en-US" smtClean="0"/>
-              <a:t>2026-05-14</a:t>
+              <a:t>2026-05-15</a:t>
             </a:fld>
             <a:endParaRPr lang="ko-KR" altLang="en-US"/>
           </a:p>
@@ -1957,7 +1957,7 @@
           <a:p>
             <a:fld id="{C6EE36B7-F0BA-4AB3-BD67-20AC5E002CC9}" type="datetimeFigureOut">
               <a:rPr lang="ko-KR" altLang="en-US" smtClean="0"/>
-              <a:t>2026-05-14</a:t>
+              <a:t>2026-05-15</a:t>
             </a:fld>
             <a:endParaRPr lang="ko-KR" altLang="en-US"/>
           </a:p>
@@ -2070,7 +2070,7 @@
           <a:p>
             <a:fld id="{C6EE36B7-F0BA-4AB3-BD67-20AC5E002CC9}" type="datetimeFigureOut">
               <a:rPr lang="ko-KR" altLang="en-US" smtClean="0"/>
-              <a:t>2026-05-14</a:t>
+              <a:t>2026-05-15</a:t>
             </a:fld>
             <a:endParaRPr lang="ko-KR" altLang="en-US"/>
           </a:p>
@@ -2381,7 +2381,7 @@
           <a:p>
             <a:fld id="{C6EE36B7-F0BA-4AB3-BD67-20AC5E002CC9}" type="datetimeFigureOut">
               <a:rPr lang="ko-KR" altLang="en-US" smtClean="0"/>
-              <a:t>2026-05-14</a:t>
+              <a:t>2026-05-15</a:t>
             </a:fld>
             <a:endParaRPr lang="ko-KR" altLang="en-US"/>
           </a:p>
@@ -2669,7 +2669,7 @@
           <a:p>
             <a:fld id="{C6EE36B7-F0BA-4AB3-BD67-20AC5E002CC9}" type="datetimeFigureOut">
               <a:rPr lang="ko-KR" altLang="en-US" smtClean="0"/>
-              <a:t>2026-05-14</a:t>
+              <a:t>2026-05-15</a:t>
             </a:fld>
             <a:endParaRPr lang="ko-KR" altLang="en-US"/>
           </a:p>
@@ -2910,7 +2910,7 @@
           <a:p>
             <a:fld id="{C6EE36B7-F0BA-4AB3-BD67-20AC5E002CC9}" type="datetimeFigureOut">
               <a:rPr lang="ko-KR" altLang="en-US" smtClean="0"/>
-              <a:t>2026-05-14</a:t>
+              <a:t>2026-05-15</a:t>
             </a:fld>
             <a:endParaRPr lang="ko-KR" altLang="en-US"/>
           </a:p>
@@ -3436,14 +3436,14 @@
           <p:nvPr>
             <p:extLst>
               <p:ext uri="{D42A27DB-BD31-4B8C-83A1-F6EECF244321}">
-                <p14:modId xmlns:p14="http://schemas.microsoft.com/office/powerpoint/2010/main" val="2110844107"/>
+                <p14:modId xmlns:p14="http://schemas.microsoft.com/office/powerpoint/2010/main" val="1934124536"/>
               </p:ext>
             </p:extLst>
           </p:nvPr>
         </p:nvGraphicFramePr>
         <p:xfrm>
           <a:off x="491065" y="880533"/>
-          <a:ext cx="4419602" cy="2556936"/>
+          <a:ext cx="4419602" cy="2277480"/>
         </p:xfrm>
         <a:graphic>
           <a:graphicData uri="http://schemas.openxmlformats.org/drawingml/2006/table">
@@ -4087,117 +4087,6 @@
                   </a:ext>
                 </a:extLst>
               </a:tr>
-              <a:tr h="279456">
-                <a:tc>
-                  <a:txBody>
-                    <a:bodyPr/>
-                    <a:lstStyle/>
-                    <a:p>
-                      <a:pPr marL="0" marR="0" lvl="0" indent="0" algn="ctr" defTabSz="914400" rtl="0" eaLnBrk="1" fontAlgn="auto" latinLnBrk="1" hangingPunct="1">
-                        <a:lnSpc>
-                          <a:spcPct val="100000"/>
-                        </a:lnSpc>
-                        <a:spcBef>
-                          <a:spcPts val="0"/>
-                        </a:spcBef>
-                        <a:spcAft>
-                          <a:spcPts val="0"/>
-                        </a:spcAft>
-                        <a:buClrTx/>
-                        <a:buSzTx/>
-                        <a:buFontTx/>
-                        <a:buNone/>
-                        <a:tabLst/>
-                        <a:defRPr/>
-                      </a:pPr>
-                      <a:r>
-                        <a:rPr lang="en-US" altLang="ko-KR" sz="1200" dirty="0">
-                          <a:latin typeface="+mj-lt"/>
-                        </a:rPr>
-                        <a:t>MEM_EDU</a:t>
-                      </a:r>
-                    </a:p>
-                  </a:txBody>
-                  <a:tcPr anchor="ctr"/>
-                </a:tc>
-                <a:tc>
-                  <a:txBody>
-                    <a:bodyPr/>
-                    <a:lstStyle/>
-                    <a:p>
-                      <a:pPr marL="0" marR="0" lvl="0" indent="0" algn="ctr" defTabSz="914400" rtl="0" eaLnBrk="1" fontAlgn="auto" latinLnBrk="1" hangingPunct="1">
-                        <a:lnSpc>
-                          <a:spcPct val="100000"/>
-                        </a:lnSpc>
-                        <a:spcBef>
-                          <a:spcPts val="0"/>
-                        </a:spcBef>
-                        <a:spcAft>
-                          <a:spcPts val="0"/>
-                        </a:spcAft>
-                        <a:buClrTx/>
-                        <a:buSzTx/>
-                        <a:buFontTx/>
-                        <a:buNone/>
-                        <a:tabLst/>
-                        <a:defRPr/>
-                      </a:pPr>
-                      <a:r>
-                        <a:rPr lang="en-US" altLang="ko-KR" sz="1200" kern="1200" dirty="0">
-                          <a:solidFill>
-                            <a:schemeClr val="dk1"/>
-                          </a:solidFill>
-                          <a:latin typeface="+mn-lt"/>
-                          <a:ea typeface="+mn-ea"/>
-                          <a:cs typeface="+mn-cs"/>
-                        </a:rPr>
-                        <a:t>varchar(5)</a:t>
-                      </a:r>
-                    </a:p>
-                  </a:txBody>
-                  <a:tcPr anchor="ctr"/>
-                </a:tc>
-                <a:tc>
-                  <a:txBody>
-                    <a:bodyPr/>
-                    <a:lstStyle/>
-                    <a:p>
-                      <a:pPr marL="0" marR="0" lvl="0" indent="0" algn="ctr" defTabSz="914400" rtl="0" eaLnBrk="1" fontAlgn="auto" latinLnBrk="1" hangingPunct="1">
-                        <a:lnSpc>
-                          <a:spcPct val="100000"/>
-                        </a:lnSpc>
-                        <a:spcBef>
-                          <a:spcPts val="0"/>
-                        </a:spcBef>
-                        <a:spcAft>
-                          <a:spcPts val="0"/>
-                        </a:spcAft>
-                        <a:buClrTx/>
-                        <a:buSzTx/>
-                        <a:buFontTx/>
-                        <a:buNone/>
-                        <a:tabLst/>
-                        <a:defRPr/>
-                      </a:pPr>
-                      <a:r>
-                        <a:rPr lang="ko-KR" altLang="en-US" sz="1200" dirty="0">
-                          <a:latin typeface="+mj-lt"/>
-                        </a:rPr>
-                        <a:t>교육수준</a:t>
-                      </a:r>
-                      <a:endParaRPr lang="en-US" altLang="ko-KR" sz="1200" dirty="0">
-                        <a:latin typeface="+mj-lt"/>
-                      </a:endParaRPr>
-                    </a:p>
-                  </a:txBody>
-                  <a:tcPr anchor="ctr"/>
-                </a:tc>
-                <a:extLst>
-                  <a:ext uri="{0D108BD9-81ED-4DB2-BD59-A6C34878D82A}">
-                    <a16:rowId xmlns:a16="http://schemas.microsoft.com/office/drawing/2014/main" val="1409380143"/>
-                  </a:ext>
-                </a:extLst>
-              </a:tr>
               <a:tr h="276866">
                 <a:tc>
                   <a:txBody>
@@ -4328,14 +4217,14 @@
           <p:nvPr>
             <p:extLst>
               <p:ext uri="{D42A27DB-BD31-4B8C-83A1-F6EECF244321}">
-                <p14:modId xmlns:p14="http://schemas.microsoft.com/office/powerpoint/2010/main" val="3116708836"/>
+                <p14:modId xmlns:p14="http://schemas.microsoft.com/office/powerpoint/2010/main" val="3191278033"/>
               </p:ext>
             </p:extLst>
           </p:nvPr>
         </p:nvGraphicFramePr>
         <p:xfrm>
-          <a:off x="7006183" y="488866"/>
-          <a:ext cx="4730748" cy="6096000"/>
+          <a:off x="6993468" y="277200"/>
+          <a:ext cx="4730748" cy="6339840"/>
         </p:xfrm>
         <a:graphic>
           <a:graphicData uri="http://schemas.openxmlformats.org/drawingml/2006/table">
@@ -4377,19 +4266,7 @@
                         <a:rPr lang="en-US" altLang="ko-KR" sz="1000" dirty="0">
                           <a:latin typeface="+mj-lt"/>
                         </a:rPr>
-                        <a:t>HEALTH</a:t>
-                      </a:r>
-                      <a:r>
-                        <a:rPr lang="ko-KR" altLang="en-US" sz="1000" dirty="0">
-                          <a:latin typeface="+mj-lt"/>
-                        </a:rPr>
-                        <a:t> </a:t>
-                      </a:r>
-                      <a:r>
-                        <a:rPr lang="en-US" altLang="ko-KR" sz="1000" dirty="0">
-                          <a:latin typeface="+mj-lt"/>
-                        </a:rPr>
-                        <a:t>DIAGNOSE</a:t>
+                        <a:t>DATA</a:t>
                       </a:r>
                       <a:endParaRPr lang="ko-KR" altLang="en-US" sz="1000" dirty="0">
                         <a:latin typeface="+mj-lt"/>
@@ -4499,7 +4376,7 @@
                         <a:rPr lang="en-US" altLang="ko-KR" sz="1000" dirty="0">
                           <a:latin typeface="+mj-lt"/>
                         </a:rPr>
-                        <a:t>DIAGNOSIS_ID(PK)</a:t>
+                        <a:t>DATA_ID(PK)</a:t>
                       </a:r>
                       <a:endParaRPr lang="ko-KR" altLang="en-US" sz="1000" dirty="0">
                         <a:latin typeface="+mj-lt"/>
@@ -6498,7 +6375,29 @@
                           <a:ea typeface="+mn-ea"/>
                           <a:cs typeface="+mn-cs"/>
                         </a:rPr>
-                        <a:t>NUMBER(3, 1)</a:t>
+                        <a:t>NUMBER</a:t>
+                      </a:r>
+                      <a:r>
+                        <a:rPr lang="en-US" altLang="ko-KR" sz="1000" kern="1200">
+                          <a:solidFill>
+                            <a:schemeClr val="dk1"/>
+                          </a:solidFill>
+                          <a:latin typeface="+mj-lt"/>
+                          <a:ea typeface="+mn-ea"/>
+                          <a:cs typeface="+mn-cs"/>
+                        </a:rPr>
+                        <a:t>(3,1</a:t>
+                      </a:r>
+                      <a:r>
+                        <a:rPr lang="en-US" altLang="ko-KR" sz="1000" kern="1200" dirty="0">
+                          <a:solidFill>
+                            <a:schemeClr val="dk1"/>
+                          </a:solidFill>
+                          <a:latin typeface="+mj-lt"/>
+                          <a:ea typeface="+mn-ea"/>
+                          <a:cs typeface="+mn-cs"/>
+                        </a:rPr>
+                        <a:t>)</a:t>
                       </a:r>
                       <a:endParaRPr lang="ko-KR" altLang="en-US" sz="1000" kern="1200" dirty="0">
                         <a:solidFill>
@@ -6547,6 +6446,109 @@
                 <a:extLst>
                   <a:ext uri="{0D108BD9-81ED-4DB2-BD59-A6C34878D82A}">
                     <a16:rowId xmlns:a16="http://schemas.microsoft.com/office/drawing/2014/main" val="3503901649"/>
+                  </a:ext>
+                </a:extLst>
+              </a:tr>
+              <a:tr h="174682">
+                <a:tc>
+                  <a:txBody>
+                    <a:bodyPr/>
+                    <a:lstStyle/>
+                    <a:p>
+                      <a:pPr algn="ctr" latinLnBrk="1"/>
+                      <a:r>
+                        <a:rPr lang="en-US" altLang="ko-KR" sz="1000" dirty="0">
+                          <a:latin typeface="+mj-lt"/>
+                        </a:rPr>
+                        <a:t>predict</a:t>
+                      </a:r>
+                      <a:endParaRPr lang="ko-KR" altLang="en-US" sz="1000" dirty="0">
+                        <a:latin typeface="+mj-lt"/>
+                      </a:endParaRPr>
+                    </a:p>
+                  </a:txBody>
+                  <a:tcPr anchor="ctr"/>
+                </a:tc>
+                <a:tc>
+                  <a:txBody>
+                    <a:bodyPr/>
+                    <a:lstStyle/>
+                    <a:p>
+                      <a:pPr marL="0" marR="0" lvl="0" indent="0" algn="ctr" defTabSz="914400" rtl="0" eaLnBrk="1" fontAlgn="auto" latinLnBrk="1" hangingPunct="1">
+                        <a:lnSpc>
+                          <a:spcPct val="100000"/>
+                        </a:lnSpc>
+                        <a:spcBef>
+                          <a:spcPts val="0"/>
+                        </a:spcBef>
+                        <a:spcAft>
+                          <a:spcPts val="0"/>
+                        </a:spcAft>
+                        <a:buClrTx/>
+                        <a:buSzTx/>
+                        <a:buFontTx/>
+                        <a:buNone/>
+                        <a:tabLst/>
+                        <a:defRPr/>
+                      </a:pPr>
+                      <a:r>
+                        <a:rPr lang="en-US" altLang="ko-KR" sz="1000" kern="1200" dirty="0">
+                          <a:solidFill>
+                            <a:schemeClr val="dk1"/>
+                          </a:solidFill>
+                          <a:latin typeface="+mj-lt"/>
+                          <a:ea typeface="+mn-ea"/>
+                          <a:cs typeface="+mn-cs"/>
+                        </a:rPr>
+                        <a:t>NUMBER(5,4)</a:t>
+                      </a:r>
+                      <a:endParaRPr lang="ko-KR" altLang="en-US" sz="1000" kern="1200" dirty="0">
+                        <a:solidFill>
+                          <a:schemeClr val="dk1"/>
+                        </a:solidFill>
+                        <a:latin typeface="+mj-lt"/>
+                        <a:ea typeface="+mn-ea"/>
+                        <a:cs typeface="+mn-cs"/>
+                      </a:endParaRPr>
+                    </a:p>
+                  </a:txBody>
+                  <a:tcPr anchor="ctr"/>
+                </a:tc>
+                <a:tc>
+                  <a:txBody>
+                    <a:bodyPr/>
+                    <a:lstStyle/>
+                    <a:p>
+                      <a:pPr marL="0" marR="0" lvl="0" indent="0" algn="ctr" defTabSz="914400" rtl="0" eaLnBrk="1" fontAlgn="auto" latinLnBrk="1" hangingPunct="1">
+                        <a:lnSpc>
+                          <a:spcPct val="100000"/>
+                        </a:lnSpc>
+                        <a:spcBef>
+                          <a:spcPts val="0"/>
+                        </a:spcBef>
+                        <a:spcAft>
+                          <a:spcPts val="0"/>
+                        </a:spcAft>
+                        <a:buClrTx/>
+                        <a:buSzTx/>
+                        <a:buFontTx/>
+                        <a:buNone/>
+                        <a:tabLst/>
+                        <a:defRPr/>
+                      </a:pPr>
+                      <a:r>
+                        <a:rPr lang="ko-KR" altLang="en-US" sz="1000" dirty="0">
+                          <a:latin typeface="+mj-lt"/>
+                        </a:rPr>
+                        <a:t>예측결과</a:t>
+                      </a:r>
+                    </a:p>
+                  </a:txBody>
+                  <a:tcPr anchor="ctr"/>
+                </a:tc>
+                <a:extLst>
+                  <a:ext uri="{0D108BD9-81ED-4DB2-BD59-A6C34878D82A}">
+                    <a16:rowId xmlns:a16="http://schemas.microsoft.com/office/drawing/2014/main" val="559573949"/>
                   </a:ext>
                 </a:extLst>
               </a:tr>
@@ -7115,13 +7117,14 @@
           </p:cNvPr>
           <p:cNvCxnSpPr>
             <a:cxnSpLocks/>
+            <a:stCxn id="59" idx="2"/>
           </p:cNvCxnSpPr>
           <p:nvPr/>
         </p:nvCxnSpPr>
         <p:spPr>
           <a:xfrm>
-            <a:off x="2700876" y="3429000"/>
-            <a:ext cx="0" cy="709504"/>
+            <a:off x="2700866" y="3158013"/>
+            <a:ext cx="10" cy="980491"/>
           </a:xfrm>
           <a:prstGeom prst="line">
             <a:avLst/>
@@ -7457,153 +7460,6 @@
       </p:sp>
       <p:sp>
         <p:nvSpPr>
-          <p:cNvPr id="54" name="타원 53">
-            <a:extLst>
-              <a:ext uri="{FF2B5EF4-FFF2-40B4-BE49-F238E27FC236}">
-                <a16:creationId xmlns:a16="http://schemas.microsoft.com/office/drawing/2014/main" id="{B9525ECA-2050-4F48-9C79-3F27E8811109}"/>
-              </a:ext>
-            </a:extLst>
-          </p:cNvPr>
-          <p:cNvSpPr/>
-          <p:nvPr/>
-        </p:nvSpPr>
-        <p:spPr>
-          <a:xfrm>
-            <a:off x="6832612" y="3887563"/>
-            <a:ext cx="78314" cy="93364"/>
-          </a:xfrm>
-          <a:prstGeom prst="ellipse">
-            <a:avLst/>
-          </a:prstGeom>
-          <a:solidFill>
-            <a:schemeClr val="bg1"/>
-          </a:solidFill>
-        </p:spPr>
-        <p:style>
-          <a:lnRef idx="2">
-            <a:schemeClr val="accent1">
-              <a:shade val="50000"/>
-            </a:schemeClr>
-          </a:lnRef>
-          <a:fillRef idx="1">
-            <a:schemeClr val="accent1"/>
-          </a:fillRef>
-          <a:effectRef idx="0">
-            <a:schemeClr val="accent1"/>
-          </a:effectRef>
-          <a:fontRef idx="minor">
-            <a:schemeClr val="lt1"/>
-          </a:fontRef>
-        </p:style>
-        <p:txBody>
-          <a:bodyPr rtlCol="0" anchor="ctr"/>
-          <a:lstStyle/>
-          <a:p>
-            <a:pPr algn="ctr"/>
-            <a:endParaRPr lang="ko-KR" altLang="en-US"/>
-          </a:p>
-        </p:txBody>
-      </p:sp>
-      <p:sp>
-        <p:nvSpPr>
-          <p:cNvPr id="55" name="타원 54">
-            <a:extLst>
-              <a:ext uri="{FF2B5EF4-FFF2-40B4-BE49-F238E27FC236}">
-                <a16:creationId xmlns:a16="http://schemas.microsoft.com/office/drawing/2014/main" id="{51BB29CA-C66D-4A2A-B48C-26B33C252201}"/>
-              </a:ext>
-            </a:extLst>
-          </p:cNvPr>
-          <p:cNvSpPr/>
-          <p:nvPr/>
-        </p:nvSpPr>
-        <p:spPr>
-          <a:xfrm>
-            <a:off x="2667004" y="3438827"/>
-            <a:ext cx="78314" cy="93364"/>
-          </a:xfrm>
-          <a:prstGeom prst="ellipse">
-            <a:avLst/>
-          </a:prstGeom>
-          <a:solidFill>
-            <a:schemeClr val="bg1"/>
-          </a:solidFill>
-        </p:spPr>
-        <p:style>
-          <a:lnRef idx="2">
-            <a:schemeClr val="accent1">
-              <a:shade val="50000"/>
-            </a:schemeClr>
-          </a:lnRef>
-          <a:fillRef idx="1">
-            <a:schemeClr val="accent1"/>
-          </a:fillRef>
-          <a:effectRef idx="0">
-            <a:schemeClr val="accent1"/>
-          </a:effectRef>
-          <a:fontRef idx="minor">
-            <a:schemeClr val="lt1"/>
-          </a:fontRef>
-        </p:style>
-        <p:txBody>
-          <a:bodyPr rtlCol="0" anchor="ctr"/>
-          <a:lstStyle/>
-          <a:p>
-            <a:pPr algn="ctr"/>
-            <a:endParaRPr lang="ko-KR" altLang="en-US"/>
-          </a:p>
-        </p:txBody>
-      </p:sp>
-      <p:sp>
-        <p:nvSpPr>
-          <p:cNvPr id="56" name="타원 55">
-            <a:extLst>
-              <a:ext uri="{FF2B5EF4-FFF2-40B4-BE49-F238E27FC236}">
-                <a16:creationId xmlns:a16="http://schemas.microsoft.com/office/drawing/2014/main" id="{7B22E300-D6A0-467C-A2C5-B407873F39B0}"/>
-              </a:ext>
-            </a:extLst>
-          </p:cNvPr>
-          <p:cNvSpPr/>
-          <p:nvPr/>
-        </p:nvSpPr>
-        <p:spPr>
-          <a:xfrm>
-            <a:off x="2658540" y="4065361"/>
-            <a:ext cx="78314" cy="93364"/>
-          </a:xfrm>
-          <a:prstGeom prst="ellipse">
-            <a:avLst/>
-          </a:prstGeom>
-          <a:solidFill>
-            <a:schemeClr val="bg1"/>
-          </a:solidFill>
-        </p:spPr>
-        <p:style>
-          <a:lnRef idx="2">
-            <a:schemeClr val="accent1">
-              <a:shade val="50000"/>
-            </a:schemeClr>
-          </a:lnRef>
-          <a:fillRef idx="1">
-            <a:schemeClr val="accent1"/>
-          </a:fillRef>
-          <a:effectRef idx="0">
-            <a:schemeClr val="accent1"/>
-          </a:effectRef>
-          <a:fontRef idx="minor">
-            <a:schemeClr val="lt1"/>
-          </a:fontRef>
-        </p:style>
-        <p:txBody>
-          <a:bodyPr rtlCol="0" anchor="ctr"/>
-          <a:lstStyle/>
-          <a:p>
-            <a:pPr algn="ctr"/>
-            <a:endParaRPr lang="ko-KR" altLang="en-US"/>
-          </a:p>
-        </p:txBody>
-      </p:sp>
-      <p:sp>
-        <p:nvSpPr>
           <p:cNvPr id="57" name="TextBox 56">
             <a:extLst>
               <a:ext uri="{FF2B5EF4-FFF2-40B4-BE49-F238E27FC236}">
@@ -7616,7 +7472,7 @@
         </p:nvSpPr>
         <p:spPr>
           <a:xfrm flipH="1">
-            <a:off x="2688171" y="3384479"/>
+            <a:off x="2654299" y="3082849"/>
             <a:ext cx="194730" cy="215444"/>
           </a:xfrm>
           <a:prstGeom prst="rect">

--- a/DB산출물/05_ERD.pptx
+++ b/DB산출물/05_ERD.pptx
@@ -4217,7 +4217,7 @@
           <p:nvPr>
             <p:extLst>
               <p:ext uri="{D42A27DB-BD31-4B8C-83A1-F6EECF244321}">
-                <p14:modId xmlns:p14="http://schemas.microsoft.com/office/powerpoint/2010/main" val="3191278033"/>
+                <p14:modId xmlns:p14="http://schemas.microsoft.com/office/powerpoint/2010/main" val="735879143"/>
               </p:ext>
             </p:extLst>
           </p:nvPr>
@@ -6332,10 +6332,10 @@
                     <a:p>
                       <a:pPr algn="ctr" latinLnBrk="1"/>
                       <a:r>
-                        <a:rPr lang="en-US" altLang="ko-KR" sz="1000" dirty="0" err="1">
-                          <a:latin typeface="+mj-lt"/>
-                        </a:rPr>
-                        <a:t>ho_incm</a:t>
+                        <a:rPr lang="en-US" altLang="ko-KR" sz="1000">
+                          <a:latin typeface="+mj-lt"/>
+                        </a:rPr>
+                        <a:t>incm</a:t>
                       </a:r>
                       <a:endParaRPr lang="ko-KR" altLang="en-US" sz="1000" dirty="0">
                         <a:latin typeface="+mj-lt"/>

--- a/DB산출물/05_ERD.pptx
+++ b/DB산출물/05_ERD.pptx
@@ -6,7 +6,6 @@
   </p:sldMasterIdLst>
   <p:sldIdLst>
     <p:sldId id="256" r:id="rId2"/>
-    <p:sldId id="257" r:id="rId3"/>
   </p:sldIdLst>
   <p:sldSz cx="12192000" cy="6858000"/>
   <p:notesSz cx="6858000" cy="9144000"/>
@@ -260,7 +259,7 @@
           <a:p>
             <a:fld id="{C6EE36B7-F0BA-4AB3-BD67-20AC5E002CC9}" type="datetimeFigureOut">
               <a:rPr lang="ko-KR" altLang="en-US" smtClean="0"/>
-              <a:t>2026-05-15</a:t>
+              <a:t>2026-05-18</a:t>
             </a:fld>
             <a:endParaRPr lang="ko-KR" altLang="en-US"/>
           </a:p>
@@ -458,7 +457,7 @@
           <a:p>
             <a:fld id="{C6EE36B7-F0BA-4AB3-BD67-20AC5E002CC9}" type="datetimeFigureOut">
               <a:rPr lang="ko-KR" altLang="en-US" smtClean="0"/>
-              <a:t>2026-05-15</a:t>
+              <a:t>2026-05-18</a:t>
             </a:fld>
             <a:endParaRPr lang="ko-KR" altLang="en-US"/>
           </a:p>
@@ -666,7 +665,7 @@
           <a:p>
             <a:fld id="{C6EE36B7-F0BA-4AB3-BD67-20AC5E002CC9}" type="datetimeFigureOut">
               <a:rPr lang="ko-KR" altLang="en-US" smtClean="0"/>
-              <a:t>2026-05-15</a:t>
+              <a:t>2026-05-18</a:t>
             </a:fld>
             <a:endParaRPr lang="ko-KR" altLang="en-US"/>
           </a:p>
@@ -864,7 +863,7 @@
           <a:p>
             <a:fld id="{C6EE36B7-F0BA-4AB3-BD67-20AC5E002CC9}" type="datetimeFigureOut">
               <a:rPr lang="ko-KR" altLang="en-US" smtClean="0"/>
-              <a:t>2026-05-15</a:t>
+              <a:t>2026-05-18</a:t>
             </a:fld>
             <a:endParaRPr lang="ko-KR" altLang="en-US"/>
           </a:p>
@@ -1139,7 +1138,7 @@
           <a:p>
             <a:fld id="{C6EE36B7-F0BA-4AB3-BD67-20AC5E002CC9}" type="datetimeFigureOut">
               <a:rPr lang="ko-KR" altLang="en-US" smtClean="0"/>
-              <a:t>2026-05-15</a:t>
+              <a:t>2026-05-18</a:t>
             </a:fld>
             <a:endParaRPr lang="ko-KR" altLang="en-US"/>
           </a:p>
@@ -1404,7 +1403,7 @@
           <a:p>
             <a:fld id="{C6EE36B7-F0BA-4AB3-BD67-20AC5E002CC9}" type="datetimeFigureOut">
               <a:rPr lang="ko-KR" altLang="en-US" smtClean="0"/>
-              <a:t>2026-05-15</a:t>
+              <a:t>2026-05-18</a:t>
             </a:fld>
             <a:endParaRPr lang="ko-KR" altLang="en-US"/>
           </a:p>
@@ -1816,7 +1815,7 @@
           <a:p>
             <a:fld id="{C6EE36B7-F0BA-4AB3-BD67-20AC5E002CC9}" type="datetimeFigureOut">
               <a:rPr lang="ko-KR" altLang="en-US" smtClean="0"/>
-              <a:t>2026-05-15</a:t>
+              <a:t>2026-05-18</a:t>
             </a:fld>
             <a:endParaRPr lang="ko-KR" altLang="en-US"/>
           </a:p>
@@ -1957,7 +1956,7 @@
           <a:p>
             <a:fld id="{C6EE36B7-F0BA-4AB3-BD67-20AC5E002CC9}" type="datetimeFigureOut">
               <a:rPr lang="ko-KR" altLang="en-US" smtClean="0"/>
-              <a:t>2026-05-15</a:t>
+              <a:t>2026-05-18</a:t>
             </a:fld>
             <a:endParaRPr lang="ko-KR" altLang="en-US"/>
           </a:p>
@@ -2070,7 +2069,7 @@
           <a:p>
             <a:fld id="{C6EE36B7-F0BA-4AB3-BD67-20AC5E002CC9}" type="datetimeFigureOut">
               <a:rPr lang="ko-KR" altLang="en-US" smtClean="0"/>
-              <a:t>2026-05-15</a:t>
+              <a:t>2026-05-18</a:t>
             </a:fld>
             <a:endParaRPr lang="ko-KR" altLang="en-US"/>
           </a:p>
@@ -2381,7 +2380,7 @@
           <a:p>
             <a:fld id="{C6EE36B7-F0BA-4AB3-BD67-20AC5E002CC9}" type="datetimeFigureOut">
               <a:rPr lang="ko-KR" altLang="en-US" smtClean="0"/>
-              <a:t>2026-05-15</a:t>
+              <a:t>2026-05-18</a:t>
             </a:fld>
             <a:endParaRPr lang="ko-KR" altLang="en-US"/>
           </a:p>
@@ -2669,7 +2668,7 @@
           <a:p>
             <a:fld id="{C6EE36B7-F0BA-4AB3-BD67-20AC5E002CC9}" type="datetimeFigureOut">
               <a:rPr lang="ko-KR" altLang="en-US" smtClean="0"/>
-              <a:t>2026-05-15</a:t>
+              <a:t>2026-05-18</a:t>
             </a:fld>
             <a:endParaRPr lang="ko-KR" altLang="en-US"/>
           </a:p>
@@ -2910,7 +2909,7 @@
           <a:p>
             <a:fld id="{C6EE36B7-F0BA-4AB3-BD67-20AC5E002CC9}" type="datetimeFigureOut">
               <a:rPr lang="ko-KR" altLang="en-US" smtClean="0"/>
-              <a:t>2026-05-15</a:t>
+              <a:t>2026-05-18</a:t>
             </a:fld>
             <a:endParaRPr lang="ko-KR" altLang="en-US"/>
           </a:p>
@@ -3341,8 +3340,8 @@
         </p:nvSpPr>
         <p:spPr>
           <a:xfrm>
-            <a:off x="160877" y="189665"/>
-            <a:ext cx="4301065" cy="369332"/>
+            <a:off x="425448" y="92534"/>
+            <a:ext cx="4036494" cy="369332"/>
           </a:xfrm>
           <a:prstGeom prst="rect">
             <a:avLst/>
@@ -3436,14 +3435,14 @@
           <p:nvPr>
             <p:extLst>
               <p:ext uri="{D42A27DB-BD31-4B8C-83A1-F6EECF244321}">
-                <p14:modId xmlns:p14="http://schemas.microsoft.com/office/powerpoint/2010/main" val="1934124536"/>
+                <p14:modId xmlns:p14="http://schemas.microsoft.com/office/powerpoint/2010/main" val="179873269"/>
               </p:ext>
             </p:extLst>
           </p:nvPr>
         </p:nvGraphicFramePr>
         <p:xfrm>
-          <a:off x="491065" y="880533"/>
-          <a:ext cx="4419602" cy="2277480"/>
+          <a:off x="491064" y="553399"/>
+          <a:ext cx="4419602" cy="1133852"/>
         </p:xfrm>
         <a:graphic>
           <a:graphicData uri="http://schemas.openxmlformats.org/drawingml/2006/table">
@@ -3452,14 +3451,14 @@
                 <a:tableStyleId>{46F890A9-2807-4EBB-B81D-B2AA78EC7F39}</a:tableStyleId>
               </a:tblPr>
               <a:tblGrid>
-                <a:gridCol w="1695646">
+                <a:gridCol w="1828802">
                   <a:extLst>
                     <a:ext uri="{9D8B030D-6E8A-4147-A177-3AD203B41FA5}">
                       <a16:colId xmlns:a16="http://schemas.microsoft.com/office/drawing/2014/main" val="1696981840"/>
                     </a:ext>
                   </a:extLst>
                 </a:gridCol>
-                <a:gridCol w="1287821">
+                <a:gridCol w="1154665">
                   <a:extLst>
                     <a:ext uri="{9D8B030D-6E8A-4147-A177-3AD203B41FA5}">
                       <a16:colId xmlns:a16="http://schemas.microsoft.com/office/drawing/2014/main" val="2515604457"/>
@@ -3474,7 +3473,7 @@
                   </a:extLst>
                 </a:gridCol>
               </a:tblGrid>
-              <a:tr h="323878">
+              <a:tr h="254720">
                 <a:tc gridSpan="3">
                   <a:txBody>
                     <a:bodyPr/>
@@ -3482,12 +3481,12 @@
                     <a:p>
                       <a:pPr algn="ctr" latinLnBrk="1"/>
                       <a:r>
-                        <a:rPr lang="en-US" altLang="ko-KR" sz="1200" b="0" dirty="0">
+                        <a:rPr lang="en-US" altLang="ko-KR" sz="1000" b="1" dirty="0">
                           <a:latin typeface="+mj-lt"/>
                         </a:rPr>
                         <a:t>MEMBER</a:t>
                       </a:r>
-                      <a:endParaRPr lang="ko-KR" altLang="en-US" sz="1200" b="0" dirty="0">
+                      <a:endParaRPr lang="ko-KR" altLang="en-US" sz="1000" b="1" dirty="0">
                         <a:latin typeface="+mj-lt"/>
                       </a:endParaRPr>
                     </a:p>
@@ -3522,20 +3521,20 @@
                   </a:ext>
                 </a:extLst>
               </a:tr>
-              <a:tr h="279456">
-                <a:tc>
-                  <a:txBody>
-                    <a:bodyPr/>
-                    <a:lstStyle/>
-                    <a:p>
-                      <a:pPr algn="ctr" latinLnBrk="1"/>
-                      <a:r>
-                        <a:rPr lang="ko-KR" altLang="en-US" sz="1200" dirty="0" err="1">
+              <a:tr h="219783">
+                <a:tc>
+                  <a:txBody>
+                    <a:bodyPr/>
+                    <a:lstStyle/>
+                    <a:p>
+                      <a:pPr algn="ctr" latinLnBrk="1"/>
+                      <a:r>
+                        <a:rPr lang="ko-KR" altLang="en-US" sz="800" dirty="0" err="1">
                           <a:latin typeface="+mj-lt"/>
                         </a:rPr>
                         <a:t>컬럼명</a:t>
                       </a:r>
-                      <a:endParaRPr lang="ko-KR" altLang="en-US" sz="1200" dirty="0">
+                      <a:endParaRPr lang="ko-KR" altLang="en-US" sz="800" dirty="0">
                         <a:latin typeface="+mj-lt"/>
                       </a:endParaRPr>
                     </a:p>
@@ -3549,7 +3548,7 @@
                     <a:p>
                       <a:pPr algn="ctr" latinLnBrk="1"/>
                       <a:r>
-                        <a:rPr lang="ko-KR" altLang="en-US" sz="1200" dirty="0">
+                        <a:rPr lang="ko-KR" altLang="en-US" sz="800" dirty="0">
                           <a:latin typeface="+mj-lt"/>
                         </a:rPr>
                         <a:t>타입</a:t>
@@ -3565,7 +3564,7 @@
                     <a:p>
                       <a:pPr algn="ctr" latinLnBrk="1"/>
                       <a:r>
-                        <a:rPr lang="ko-KR" altLang="en-US" sz="1200" dirty="0">
+                        <a:rPr lang="ko-KR" altLang="en-US" sz="800" dirty="0">
                           <a:latin typeface="+mj-lt"/>
                         </a:rPr>
                         <a:t>설명</a:t>
@@ -3580,20 +3579,20 @@
                   </a:ext>
                 </a:extLst>
               </a:tr>
-              <a:tr h="279456">
-                <a:tc>
-                  <a:txBody>
-                    <a:bodyPr/>
-                    <a:lstStyle/>
-                    <a:p>
-                      <a:pPr algn="ctr" latinLnBrk="1"/>
-                      <a:r>
-                        <a:rPr lang="en-US" altLang="ko-KR" sz="1200" dirty="0">
+              <a:tr h="219783">
+                <a:tc>
+                  <a:txBody>
+                    <a:bodyPr/>
+                    <a:lstStyle/>
+                    <a:p>
+                      <a:pPr algn="ctr" latinLnBrk="1"/>
+                      <a:r>
+                        <a:rPr lang="en-US" altLang="ko-KR" sz="800" dirty="0">
                           <a:latin typeface="+mj-lt"/>
                         </a:rPr>
                         <a:t>MEM_ID(PK)</a:t>
                       </a:r>
-                      <a:endParaRPr lang="ko-KR" altLang="en-US" sz="1200" dirty="0">
+                      <a:endParaRPr lang="ko-KR" altLang="en-US" sz="800" dirty="0">
                         <a:latin typeface="+mj-lt"/>
                       </a:endParaRPr>
                     </a:p>
@@ -3623,7 +3622,7 @@
                         <a:defRPr/>
                       </a:pPr>
                       <a:r>
-                        <a:rPr lang="en-US" altLang="ko-KR" sz="1200" dirty="0">
+                        <a:rPr lang="en-US" altLang="ko-KR" sz="800" dirty="0">
                           <a:latin typeface="+mj-lt"/>
                         </a:rPr>
                         <a:t>varchar2(15)</a:t>
@@ -3655,13 +3654,13 @@
                         <a:defRPr/>
                       </a:pPr>
                       <a:r>
-                        <a:rPr lang="ko-KR" altLang="en-US" sz="1200" dirty="0">
+                        <a:rPr lang="ko-KR" altLang="en-US" sz="800" dirty="0">
                           <a:latin typeface="+mj-lt"/>
                         </a:rPr>
                         <a:t>회원</a:t>
                       </a:r>
                       <a:r>
-                        <a:rPr lang="en-US" altLang="ko-KR" sz="1200" dirty="0">
+                        <a:rPr lang="en-US" altLang="ko-KR" sz="800" dirty="0">
                           <a:latin typeface="+mj-lt"/>
                         </a:rPr>
                         <a:t>ID</a:t>
@@ -3676,20 +3675,20 @@
                   </a:ext>
                 </a:extLst>
               </a:tr>
-              <a:tr h="279456">
-                <a:tc>
-                  <a:txBody>
-                    <a:bodyPr/>
-                    <a:lstStyle/>
-                    <a:p>
-                      <a:pPr algn="ctr" latinLnBrk="1"/>
-                      <a:r>
-                        <a:rPr lang="en-US" altLang="ko-KR" sz="1200" dirty="0">
-                          <a:latin typeface="+mj-lt"/>
-                        </a:rPr>
-                        <a:t>MEM_PASS</a:t>
-                      </a:r>
-                      <a:endParaRPr lang="ko-KR" altLang="en-US" sz="1200" dirty="0">
+              <a:tr h="219783">
+                <a:tc>
+                  <a:txBody>
+                    <a:bodyPr/>
+                    <a:lstStyle/>
+                    <a:p>
+                      <a:pPr algn="ctr" latinLnBrk="1"/>
+                      <a:r>
+                        <a:rPr lang="en-US" altLang="ko-KR" sz="800" dirty="0">
+                          <a:latin typeface="+mj-lt"/>
+                        </a:rPr>
+                        <a:t>MEM_PHONE</a:t>
+                      </a:r>
+                      <a:endParaRPr lang="ko-KR" altLang="en-US" sz="800" dirty="0">
                         <a:latin typeface="+mj-lt"/>
                       </a:endParaRPr>
                     </a:p>
@@ -3719,7 +3718,7 @@
                         <a:defRPr/>
                       </a:pPr>
                       <a:r>
-                        <a:rPr lang="en-US" altLang="ko-KR" sz="1200" dirty="0">
+                        <a:rPr lang="en-US" altLang="ko-KR" sz="800" dirty="0">
                           <a:latin typeface="+mj-lt"/>
                         </a:rPr>
                         <a:t>varchar2(15)</a:t>
@@ -3751,12 +3750,12 @@
                         <a:defRPr/>
                       </a:pPr>
                       <a:r>
-                        <a:rPr lang="ko-KR" altLang="en-US" sz="1200" dirty="0">
-                          <a:latin typeface="+mj-lt"/>
-                        </a:rPr>
-                        <a:t>비밀번호</a:t>
-                      </a:r>
-                      <a:endParaRPr lang="en-US" altLang="ko-KR" sz="1200" dirty="0">
+                        <a:rPr lang="ko-KR" altLang="en-US" sz="800" dirty="0">
+                          <a:latin typeface="+mj-lt"/>
+                        </a:rPr>
+                        <a:t>전화번호</a:t>
+                      </a:r>
+                      <a:endParaRPr lang="en-US" altLang="ko-KR" sz="800" dirty="0">
                         <a:latin typeface="+mj-lt"/>
                       </a:endParaRPr>
                     </a:p>
@@ -3769,7 +3768,7 @@
                   </a:ext>
                 </a:extLst>
               </a:tr>
-              <a:tr h="279456">
+              <a:tr h="219783">
                 <a:tc>
                   <a:txBody>
                     <a:bodyPr/>
@@ -3793,7 +3792,7 @@
                         <a:defRPr/>
                       </a:pPr>
                       <a:r>
-                        <a:rPr lang="en-US" altLang="ko-KR" sz="1200" dirty="0">
+                        <a:rPr lang="en-US" altLang="ko-KR" sz="800" dirty="0">
                           <a:latin typeface="+mj-lt"/>
                         </a:rPr>
                         <a:t>MEM_NAME</a:t>
@@ -3825,7 +3824,7 @@
                         <a:defRPr/>
                       </a:pPr>
                       <a:r>
-                        <a:rPr lang="en-US" altLang="ko-KR" sz="1200" dirty="0">
+                        <a:rPr lang="en-US" altLang="ko-KR" sz="800" dirty="0">
                           <a:latin typeface="+mj-lt"/>
                         </a:rPr>
                         <a:t>varchar2(20) </a:t>
@@ -3857,12 +3856,12 @@
                         <a:defRPr/>
                       </a:pPr>
                       <a:r>
-                        <a:rPr lang="ko-KR" altLang="en-US" sz="1200" dirty="0">
+                        <a:rPr lang="ko-KR" altLang="en-US" sz="800" dirty="0">
                           <a:latin typeface="+mj-lt"/>
                         </a:rPr>
                         <a:t>성명</a:t>
                       </a:r>
-                      <a:endParaRPr lang="en-US" altLang="ko-KR" sz="1200" dirty="0">
+                      <a:endParaRPr lang="en-US" altLang="ko-KR" sz="800" dirty="0">
                         <a:latin typeface="+mj-lt"/>
                       </a:endParaRPr>
                     </a:p>
@@ -3872,329 +3871,6 @@
                 <a:extLst>
                   <a:ext uri="{0D108BD9-81ED-4DB2-BD59-A6C34878D82A}">
                     <a16:rowId xmlns:a16="http://schemas.microsoft.com/office/drawing/2014/main" val="1203292638"/>
-                  </a:ext>
-                </a:extLst>
-              </a:tr>
-              <a:tr h="279456">
-                <a:tc>
-                  <a:txBody>
-                    <a:bodyPr/>
-                    <a:lstStyle/>
-                    <a:p>
-                      <a:pPr marL="0" marR="0" lvl="0" indent="0" algn="ctr" defTabSz="914400" rtl="0" eaLnBrk="1" fontAlgn="auto" latinLnBrk="1" hangingPunct="1">
-                        <a:lnSpc>
-                          <a:spcPct val="100000"/>
-                        </a:lnSpc>
-                        <a:spcBef>
-                          <a:spcPts val="0"/>
-                        </a:spcBef>
-                        <a:spcAft>
-                          <a:spcPts val="0"/>
-                        </a:spcAft>
-                        <a:buClrTx/>
-                        <a:buSzTx/>
-                        <a:buFontTx/>
-                        <a:buNone/>
-                        <a:tabLst/>
-                        <a:defRPr/>
-                      </a:pPr>
-                      <a:r>
-                        <a:rPr lang="en-US" altLang="ko-KR" sz="1200" dirty="0">
-                          <a:latin typeface="+mj-lt"/>
-                        </a:rPr>
-                        <a:t>MEM_ADD</a:t>
-                      </a:r>
-                    </a:p>
-                  </a:txBody>
-                  <a:tcPr anchor="ctr"/>
-                </a:tc>
-                <a:tc>
-                  <a:txBody>
-                    <a:bodyPr/>
-                    <a:lstStyle/>
-                    <a:p>
-                      <a:pPr marL="0" marR="0" lvl="0" indent="0" algn="ctr" defTabSz="914400" rtl="0" eaLnBrk="1" fontAlgn="auto" latinLnBrk="1" hangingPunct="1">
-                        <a:lnSpc>
-                          <a:spcPct val="100000"/>
-                        </a:lnSpc>
-                        <a:spcBef>
-                          <a:spcPts val="0"/>
-                        </a:spcBef>
-                        <a:spcAft>
-                          <a:spcPts val="0"/>
-                        </a:spcAft>
-                        <a:buClrTx/>
-                        <a:buSzTx/>
-                        <a:buFontTx/>
-                        <a:buNone/>
-                        <a:tabLst/>
-                        <a:defRPr/>
-                      </a:pPr>
-                      <a:r>
-                        <a:rPr lang="en-US" altLang="ko-KR" sz="1200" dirty="0">
-                          <a:latin typeface="+mj-lt"/>
-                        </a:rPr>
-                        <a:t>varchar2(100) </a:t>
-                      </a:r>
-                    </a:p>
-                  </a:txBody>
-                  <a:tcPr anchor="ctr"/>
-                </a:tc>
-                <a:tc>
-                  <a:txBody>
-                    <a:bodyPr/>
-                    <a:lstStyle/>
-                    <a:p>
-                      <a:pPr marL="0" marR="0" lvl="0" indent="0" algn="ctr" defTabSz="914400" rtl="0" eaLnBrk="1" fontAlgn="auto" latinLnBrk="1" hangingPunct="1">
-                        <a:lnSpc>
-                          <a:spcPct val="100000"/>
-                        </a:lnSpc>
-                        <a:spcBef>
-                          <a:spcPts val="0"/>
-                        </a:spcBef>
-                        <a:spcAft>
-                          <a:spcPts val="0"/>
-                        </a:spcAft>
-                        <a:buClrTx/>
-                        <a:buSzTx/>
-                        <a:buFontTx/>
-                        <a:buNone/>
-                        <a:tabLst/>
-                        <a:defRPr/>
-                      </a:pPr>
-                      <a:r>
-                        <a:rPr lang="ko-KR" altLang="en-US" sz="1200" dirty="0">
-                          <a:latin typeface="+mj-lt"/>
-                        </a:rPr>
-                        <a:t>주소</a:t>
-                      </a:r>
-                      <a:endParaRPr lang="en-US" altLang="ko-KR" sz="1200" dirty="0">
-                        <a:latin typeface="+mj-lt"/>
-                      </a:endParaRPr>
-                    </a:p>
-                  </a:txBody>
-                  <a:tcPr anchor="ctr"/>
-                </a:tc>
-                <a:extLst>
-                  <a:ext uri="{0D108BD9-81ED-4DB2-BD59-A6C34878D82A}">
-                    <a16:rowId xmlns:a16="http://schemas.microsoft.com/office/drawing/2014/main" val="3137188711"/>
-                  </a:ext>
-                </a:extLst>
-              </a:tr>
-              <a:tr h="279456">
-                <a:tc>
-                  <a:txBody>
-                    <a:bodyPr/>
-                    <a:lstStyle/>
-                    <a:p>
-                      <a:pPr marL="0" marR="0" lvl="0" indent="0" algn="ctr" defTabSz="914400" rtl="0" eaLnBrk="1" fontAlgn="auto" latinLnBrk="1" hangingPunct="1">
-                        <a:lnSpc>
-                          <a:spcPct val="100000"/>
-                        </a:lnSpc>
-                        <a:spcBef>
-                          <a:spcPts val="0"/>
-                        </a:spcBef>
-                        <a:spcAft>
-                          <a:spcPts val="0"/>
-                        </a:spcAft>
-                        <a:buClrTx/>
-                        <a:buSzTx/>
-                        <a:buFontTx/>
-                        <a:buNone/>
-                        <a:tabLst/>
-                        <a:defRPr/>
-                      </a:pPr>
-                      <a:r>
-                        <a:rPr lang="en-US" altLang="ko-KR" sz="1200" dirty="0">
-                          <a:latin typeface="+mj-lt"/>
-                        </a:rPr>
-                        <a:t>MEM_MAIL</a:t>
-                      </a:r>
-                    </a:p>
-                  </a:txBody>
-                  <a:tcPr anchor="ctr"/>
-                </a:tc>
-                <a:tc>
-                  <a:txBody>
-                    <a:bodyPr/>
-                    <a:lstStyle/>
-                    <a:p>
-                      <a:pPr marL="0" marR="0" lvl="0" indent="0" algn="ctr" defTabSz="914400" rtl="0" eaLnBrk="1" fontAlgn="auto" latinLnBrk="1" hangingPunct="1">
-                        <a:lnSpc>
-                          <a:spcPct val="100000"/>
-                        </a:lnSpc>
-                        <a:spcBef>
-                          <a:spcPts val="0"/>
-                        </a:spcBef>
-                        <a:spcAft>
-                          <a:spcPts val="0"/>
-                        </a:spcAft>
-                        <a:buClrTx/>
-                        <a:buSzTx/>
-                        <a:buFontTx/>
-                        <a:buNone/>
-                        <a:tabLst/>
-                        <a:defRPr/>
-                      </a:pPr>
-                      <a:r>
-                        <a:rPr lang="en-US" altLang="ko-KR" sz="1200" dirty="0">
-                          <a:latin typeface="+mj-lt"/>
-                        </a:rPr>
-                        <a:t>varchar2(50) </a:t>
-                      </a:r>
-                    </a:p>
-                  </a:txBody>
-                  <a:tcPr anchor="ctr"/>
-                </a:tc>
-                <a:tc>
-                  <a:txBody>
-                    <a:bodyPr/>
-                    <a:lstStyle/>
-                    <a:p>
-                      <a:pPr marL="0" marR="0" lvl="0" indent="0" algn="ctr" defTabSz="914400" rtl="0" eaLnBrk="1" fontAlgn="auto" latinLnBrk="1" hangingPunct="1">
-                        <a:lnSpc>
-                          <a:spcPct val="100000"/>
-                        </a:lnSpc>
-                        <a:spcBef>
-                          <a:spcPts val="0"/>
-                        </a:spcBef>
-                        <a:spcAft>
-                          <a:spcPts val="0"/>
-                        </a:spcAft>
-                        <a:buClrTx/>
-                        <a:buSzTx/>
-                        <a:buFontTx/>
-                        <a:buNone/>
-                        <a:tabLst/>
-                        <a:defRPr/>
-                      </a:pPr>
-                      <a:r>
-                        <a:rPr lang="ko-KR" altLang="en-US" sz="1200" dirty="0">
-                          <a:latin typeface="+mj-lt"/>
-                        </a:rPr>
-                        <a:t>이메일</a:t>
-                      </a:r>
-                      <a:endParaRPr lang="en-US" altLang="ko-KR" sz="1200" dirty="0">
-                        <a:latin typeface="+mj-lt"/>
-                      </a:endParaRPr>
-                    </a:p>
-                  </a:txBody>
-                  <a:tcPr anchor="ctr"/>
-                </a:tc>
-                <a:extLst>
-                  <a:ext uri="{0D108BD9-81ED-4DB2-BD59-A6C34878D82A}">
-                    <a16:rowId xmlns:a16="http://schemas.microsoft.com/office/drawing/2014/main" val="3679866372"/>
-                  </a:ext>
-                </a:extLst>
-              </a:tr>
-              <a:tr h="276866">
-                <a:tc>
-                  <a:txBody>
-                    <a:bodyPr/>
-                    <a:lstStyle/>
-                    <a:p>
-                      <a:pPr marL="0" marR="0" lvl="0" indent="0" algn="ctr" defTabSz="914400" rtl="0" eaLnBrk="1" fontAlgn="auto" latinLnBrk="1" hangingPunct="1">
-                        <a:lnSpc>
-                          <a:spcPct val="100000"/>
-                        </a:lnSpc>
-                        <a:spcBef>
-                          <a:spcPts val="0"/>
-                        </a:spcBef>
-                        <a:spcAft>
-                          <a:spcPts val="0"/>
-                        </a:spcAft>
-                        <a:buClrTx/>
-                        <a:buSzTx/>
-                        <a:buFontTx/>
-                        <a:buNone/>
-                        <a:tabLst/>
-                        <a:defRPr/>
-                      </a:pPr>
-                      <a:r>
-                        <a:rPr lang="en-US" altLang="ko-KR" sz="1200" dirty="0">
-                          <a:latin typeface="+mj-lt"/>
-                        </a:rPr>
-                        <a:t>MEM_CREATED</a:t>
-                      </a:r>
-                    </a:p>
-                  </a:txBody>
-                  <a:tcPr anchor="ctr"/>
-                </a:tc>
-                <a:tc>
-                  <a:txBody>
-                    <a:bodyPr/>
-                    <a:lstStyle/>
-                    <a:p>
-                      <a:pPr marL="0" marR="0" lvl="0" indent="0" algn="ctr" defTabSz="914400" rtl="0" eaLnBrk="1" fontAlgn="auto" latinLnBrk="1" hangingPunct="1">
-                        <a:lnSpc>
-                          <a:spcPct val="100000"/>
-                        </a:lnSpc>
-                        <a:spcBef>
-                          <a:spcPts val="0"/>
-                        </a:spcBef>
-                        <a:spcAft>
-                          <a:spcPts val="0"/>
-                        </a:spcAft>
-                        <a:buClrTx/>
-                        <a:buSzTx/>
-                        <a:buFontTx/>
-                        <a:buNone/>
-                        <a:tabLst/>
-                        <a:defRPr/>
-                      </a:pPr>
-                      <a:r>
-                        <a:rPr lang="en-US" altLang="ko-KR" sz="1200" kern="1200" dirty="0">
-                          <a:solidFill>
-                            <a:schemeClr val="dk1"/>
-                          </a:solidFill>
-                          <a:latin typeface="+mn-lt"/>
-                          <a:ea typeface="+mn-ea"/>
-                          <a:cs typeface="+mn-cs"/>
-                        </a:rPr>
-                        <a:t>DATE</a:t>
-                      </a:r>
-                    </a:p>
-                  </a:txBody>
-                  <a:tcPr anchor="ctr"/>
-                </a:tc>
-                <a:tc>
-                  <a:txBody>
-                    <a:bodyPr/>
-                    <a:lstStyle/>
-                    <a:p>
-                      <a:pPr marL="0" marR="0" lvl="0" indent="0" algn="ctr" defTabSz="914400" rtl="0" eaLnBrk="1" fontAlgn="auto" latinLnBrk="1" hangingPunct="1">
-                        <a:lnSpc>
-                          <a:spcPct val="100000"/>
-                        </a:lnSpc>
-                        <a:spcBef>
-                          <a:spcPts val="0"/>
-                        </a:spcBef>
-                        <a:spcAft>
-                          <a:spcPts val="0"/>
-                        </a:spcAft>
-                        <a:buClrTx/>
-                        <a:buSzTx/>
-                        <a:buFontTx/>
-                        <a:buNone/>
-                        <a:tabLst/>
-                        <a:defRPr/>
-                      </a:pPr>
-                      <a:r>
-                        <a:rPr lang="ko-KR" altLang="en-US" sz="1200" dirty="0">
-                          <a:latin typeface="+mj-lt"/>
-                        </a:rPr>
-                        <a:t>회원등록일</a:t>
-                      </a:r>
-                      <a:endParaRPr lang="en-US" altLang="ko-KR" sz="1200" dirty="0">
-                        <a:latin typeface="+mj-lt"/>
-                      </a:endParaRPr>
-                    </a:p>
-                  </a:txBody>
-                  <a:tcPr anchor="ctr"/>
-                </a:tc>
-                <a:extLst>
-                  <a:ext uri="{0D108BD9-81ED-4DB2-BD59-A6C34878D82A}">
-                    <a16:rowId xmlns:a16="http://schemas.microsoft.com/office/drawing/2014/main" val="1401699111"/>
                   </a:ext>
                 </a:extLst>
               </a:tr>
@@ -4217,13 +3893,13 @@
           <p:nvPr>
             <p:extLst>
               <p:ext uri="{D42A27DB-BD31-4B8C-83A1-F6EECF244321}">
-                <p14:modId xmlns:p14="http://schemas.microsoft.com/office/powerpoint/2010/main" val="735879143"/>
+                <p14:modId xmlns:p14="http://schemas.microsoft.com/office/powerpoint/2010/main" val="548430906"/>
               </p:ext>
             </p:extLst>
           </p:nvPr>
         </p:nvGraphicFramePr>
         <p:xfrm>
-          <a:off x="6993468" y="277200"/>
+          <a:off x="7035804" y="277200"/>
           <a:ext cx="4730748" cy="6339840"/>
         </p:xfrm>
         <a:graphic>
@@ -6058,21 +5734,21 @@
                         <a:defRPr/>
                       </a:pPr>
                       <a:r>
-                        <a:rPr lang="en-US" altLang="ko-KR" sz="1000" kern="1200" dirty="0">
+                        <a:rPr lang="en-US" altLang="ko-KR" sz="1000" kern="1200">
                           <a:solidFill>
                             <a:schemeClr val="dk1"/>
                           </a:solidFill>
-                          <a:latin typeface="+mj-lt"/>
+                          <a:latin typeface="+mn-lt"/>
                           <a:ea typeface="+mn-ea"/>
                           <a:cs typeface="+mn-cs"/>
                         </a:rPr>
-                        <a:t>varchar(10)</a:t>
+                        <a:t>NUMBER(1)</a:t>
                       </a:r>
                       <a:endParaRPr lang="ko-KR" altLang="en-US" sz="1000" kern="1200" dirty="0">
                         <a:solidFill>
                           <a:schemeClr val="dk1"/>
                         </a:solidFill>
-                        <a:latin typeface="+mj-lt"/>
+                        <a:latin typeface="+mn-lt"/>
                         <a:ea typeface="+mn-ea"/>
                         <a:cs typeface="+mn-cs"/>
                       </a:endParaRPr>
@@ -6570,7 +6246,7 @@
         </p:nvCxnSpPr>
         <p:spPr>
           <a:xfrm>
-            <a:off x="491065" y="277200"/>
+            <a:off x="491065" y="167133"/>
             <a:ext cx="0" cy="211666"/>
           </a:xfrm>
           <a:prstGeom prst="line">
@@ -6607,14 +6283,14 @@
           <p:nvPr>
             <p:extLst>
               <p:ext uri="{D42A27DB-BD31-4B8C-83A1-F6EECF244321}">
-                <p14:modId xmlns:p14="http://schemas.microsoft.com/office/powerpoint/2010/main" val="4029606702"/>
+                <p14:modId xmlns:p14="http://schemas.microsoft.com/office/powerpoint/2010/main" val="1455491900"/>
               </p:ext>
             </p:extLst>
           </p:nvPr>
         </p:nvGraphicFramePr>
         <p:xfrm>
-          <a:off x="491076" y="4189306"/>
-          <a:ext cx="4419600" cy="2468880"/>
+          <a:off x="506428" y="2436322"/>
+          <a:ext cx="4384656" cy="1950720"/>
         </p:xfrm>
         <a:graphic>
           <a:graphicData uri="http://schemas.openxmlformats.org/drawingml/2006/table">
@@ -6623,21 +6299,21 @@
                 <a:tableStyleId>{46F890A9-2807-4EBB-B81D-B2AA78EC7F39}</a:tableStyleId>
               </a:tblPr>
               <a:tblGrid>
-                <a:gridCol w="1473200">
+                <a:gridCol w="1461552">
                   <a:extLst>
                     <a:ext uri="{9D8B030D-6E8A-4147-A177-3AD203B41FA5}">
                       <a16:colId xmlns:a16="http://schemas.microsoft.com/office/drawing/2014/main" val="1824734667"/>
                     </a:ext>
                   </a:extLst>
                 </a:gridCol>
-                <a:gridCol w="1473200">
+                <a:gridCol w="1461552">
                   <a:extLst>
                     <a:ext uri="{9D8B030D-6E8A-4147-A177-3AD203B41FA5}">
                       <a16:colId xmlns:a16="http://schemas.microsoft.com/office/drawing/2014/main" val="3879674917"/>
                     </a:ext>
                   </a:extLst>
                 </a:gridCol>
-                <a:gridCol w="1473200">
+                <a:gridCol w="1461552">
                   <a:extLst>
                     <a:ext uri="{9D8B030D-6E8A-4147-A177-3AD203B41FA5}">
                       <a16:colId xmlns:a16="http://schemas.microsoft.com/office/drawing/2014/main" val="1579298443"/>
@@ -6645,7 +6321,7 @@
                   </a:extLst>
                 </a:gridCol>
               </a:tblGrid>
-              <a:tr h="166072">
+              <a:tr h="147441">
                 <a:tc gridSpan="3">
                   <a:txBody>
                     <a:bodyPr/>
@@ -6653,10 +6329,10 @@
                     <a:p>
                       <a:pPr algn="ctr" latinLnBrk="1"/>
                       <a:r>
-                        <a:rPr lang="en-US" altLang="ko-KR" sz="1200" dirty="0"/>
+                        <a:rPr lang="en-US" altLang="ko-KR" sz="1000" dirty="0"/>
                         <a:t>COMMUNITY</a:t>
                       </a:r>
-                      <a:endParaRPr lang="ko-KR" altLang="en-US" sz="1200" dirty="0"/>
+                      <a:endParaRPr lang="ko-KR" altLang="en-US" sz="1000" dirty="0"/>
                     </a:p>
                   </a:txBody>
                   <a:tcPr/>
@@ -6689,18 +6365,18 @@
                   </a:ext>
                 </a:extLst>
               </a:tr>
-              <a:tr h="166072">
-                <a:tc>
-                  <a:txBody>
-                    <a:bodyPr/>
-                    <a:lstStyle/>
-                    <a:p>
-                      <a:pPr algn="ctr" latinLnBrk="1"/>
-                      <a:r>
-                        <a:rPr lang="ko-KR" altLang="en-US" sz="1200" dirty="0" err="1"/>
+              <a:tr h="147441">
+                <a:tc>
+                  <a:txBody>
+                    <a:bodyPr/>
+                    <a:lstStyle/>
+                    <a:p>
+                      <a:pPr algn="ctr" latinLnBrk="1"/>
+                      <a:r>
+                        <a:rPr lang="ko-KR" altLang="en-US" sz="800" dirty="0" err="1"/>
                         <a:t>컬럼명</a:t>
                       </a:r>
-                      <a:endParaRPr lang="ko-KR" altLang="en-US" sz="1200" dirty="0"/>
+                      <a:endParaRPr lang="ko-KR" altLang="en-US" sz="800" dirty="0"/>
                     </a:p>
                   </a:txBody>
                   <a:tcPr/>
@@ -6712,10 +6388,10 @@
                     <a:p>
                       <a:pPr algn="ctr" latinLnBrk="1"/>
                       <a:r>
-                        <a:rPr lang="ko-KR" altLang="en-US" sz="1200"/>
+                        <a:rPr lang="ko-KR" altLang="en-US" sz="800"/>
                         <a:t>타입</a:t>
                       </a:r>
-                      <a:endParaRPr lang="ko-KR" altLang="en-US" sz="1200" dirty="0"/>
+                      <a:endParaRPr lang="ko-KR" altLang="en-US" sz="800" dirty="0"/>
                     </a:p>
                   </a:txBody>
                   <a:tcPr/>
@@ -6727,7 +6403,7 @@
                     <a:p>
                       <a:pPr algn="ctr" latinLnBrk="1"/>
                       <a:r>
-                        <a:rPr lang="ko-KR" altLang="en-US" sz="1200" dirty="0"/>
+                        <a:rPr lang="ko-KR" altLang="en-US" sz="800" dirty="0"/>
                         <a:t>설명</a:t>
                       </a:r>
                     </a:p>
@@ -6740,18 +6416,18 @@
                   </a:ext>
                 </a:extLst>
               </a:tr>
-              <a:tr h="166072">
-                <a:tc>
-                  <a:txBody>
-                    <a:bodyPr/>
-                    <a:lstStyle/>
-                    <a:p>
-                      <a:pPr algn="ctr" latinLnBrk="1"/>
-                      <a:r>
-                        <a:rPr lang="en-US" altLang="ko-KR" sz="1200" dirty="0"/>
+              <a:tr h="147441">
+                <a:tc>
+                  <a:txBody>
+                    <a:bodyPr/>
+                    <a:lstStyle/>
+                    <a:p>
+                      <a:pPr algn="ctr" latinLnBrk="1"/>
+                      <a:r>
+                        <a:rPr lang="en-US" altLang="ko-KR" sz="800" dirty="0"/>
                         <a:t>COM_ID(PK)</a:t>
                       </a:r>
-                      <a:endParaRPr lang="ko-KR" altLang="en-US" sz="1200" dirty="0"/>
+                      <a:endParaRPr lang="ko-KR" altLang="en-US" sz="800" dirty="0"/>
                     </a:p>
                   </a:txBody>
                   <a:tcPr/>
@@ -6763,10 +6439,10 @@
                     <a:p>
                       <a:pPr algn="ctr" latinLnBrk="1"/>
                       <a:r>
-                        <a:rPr lang="en-US" altLang="ko-KR" sz="1200"/>
+                        <a:rPr lang="en-US" altLang="ko-KR" sz="800"/>
                         <a:t>NUMBER</a:t>
                       </a:r>
-                      <a:endParaRPr lang="ko-KR" altLang="en-US" sz="1200" dirty="0"/>
+                      <a:endParaRPr lang="ko-KR" altLang="en-US" sz="800" dirty="0"/>
                     </a:p>
                   </a:txBody>
                   <a:tcPr/>
@@ -6778,7 +6454,7 @@
                     <a:p>
                       <a:pPr algn="ctr" latinLnBrk="1"/>
                       <a:r>
-                        <a:rPr lang="ko-KR" altLang="en-US" sz="1200" dirty="0"/>
+                        <a:rPr lang="ko-KR" altLang="en-US" sz="800" dirty="0"/>
                         <a:t>게시글 번호</a:t>
                       </a:r>
                     </a:p>
@@ -6791,18 +6467,18 @@
                   </a:ext>
                 </a:extLst>
               </a:tr>
-              <a:tr h="166072">
-                <a:tc>
-                  <a:txBody>
-                    <a:bodyPr/>
-                    <a:lstStyle/>
-                    <a:p>
-                      <a:pPr algn="ctr" latinLnBrk="1"/>
-                      <a:r>
-                        <a:rPr lang="en-US" altLang="ko-KR" sz="1200" dirty="0"/>
+              <a:tr h="147441">
+                <a:tc>
+                  <a:txBody>
+                    <a:bodyPr/>
+                    <a:lstStyle/>
+                    <a:p>
+                      <a:pPr algn="ctr" latinLnBrk="1"/>
+                      <a:r>
+                        <a:rPr lang="en-US" altLang="ko-KR" sz="800" dirty="0"/>
                         <a:t>MEM_ID(FK)</a:t>
                       </a:r>
-                      <a:endParaRPr lang="ko-KR" altLang="en-US" sz="1200" dirty="0"/>
+                      <a:endParaRPr lang="ko-KR" altLang="en-US" sz="800" dirty="0"/>
                     </a:p>
                   </a:txBody>
                   <a:tcPr/>
@@ -6814,10 +6490,10 @@
                     <a:p>
                       <a:pPr algn="ctr" latinLnBrk="1"/>
                       <a:r>
-                        <a:rPr lang="en-US" altLang="ko-KR" sz="1200" dirty="0"/>
+                        <a:rPr lang="en-US" altLang="ko-KR" sz="800" dirty="0"/>
                         <a:t>VARCHAR2(15)</a:t>
                       </a:r>
-                      <a:endParaRPr lang="ko-KR" altLang="en-US" sz="1200" dirty="0"/>
+                      <a:endParaRPr lang="ko-KR" altLang="en-US" sz="800" dirty="0"/>
                     </a:p>
                   </a:txBody>
                   <a:tcPr/>
@@ -6829,14 +6505,14 @@
                     <a:p>
                       <a:pPr algn="ctr" latinLnBrk="1"/>
                       <a:r>
-                        <a:rPr lang="ko-KR" altLang="en-US" sz="1200" dirty="0"/>
+                        <a:rPr lang="ko-KR" altLang="en-US" sz="800" dirty="0"/>
                         <a:t>작성자 </a:t>
                       </a:r>
                       <a:r>
-                        <a:rPr lang="en-US" altLang="ko-KR" sz="1200" dirty="0"/>
+                        <a:rPr lang="en-US" altLang="ko-KR" sz="800" dirty="0"/>
                         <a:t>ID</a:t>
                       </a:r>
-                      <a:endParaRPr lang="ko-KR" altLang="en-US" sz="1200" dirty="0"/>
+                      <a:endParaRPr lang="ko-KR" altLang="en-US" sz="800" dirty="0"/>
                     </a:p>
                   </a:txBody>
                   <a:tcPr/>
@@ -6847,18 +6523,18 @@
                   </a:ext>
                 </a:extLst>
               </a:tr>
-              <a:tr h="166072">
-                <a:tc>
-                  <a:txBody>
-                    <a:bodyPr/>
-                    <a:lstStyle/>
-                    <a:p>
-                      <a:pPr algn="ctr" latinLnBrk="1"/>
-                      <a:r>
-                        <a:rPr lang="en-US" altLang="ko-KR" sz="1200" dirty="0"/>
+              <a:tr h="147441">
+                <a:tc>
+                  <a:txBody>
+                    <a:bodyPr/>
+                    <a:lstStyle/>
+                    <a:p>
+                      <a:pPr algn="ctr" latinLnBrk="1"/>
+                      <a:r>
+                        <a:rPr lang="en-US" altLang="ko-KR" sz="800" dirty="0"/>
                         <a:t>COM_TITLE</a:t>
                       </a:r>
-                      <a:endParaRPr lang="ko-KR" altLang="en-US" sz="1200" dirty="0"/>
+                      <a:endParaRPr lang="ko-KR" altLang="en-US" sz="800" dirty="0"/>
                     </a:p>
                   </a:txBody>
                   <a:tcPr/>
@@ -6870,10 +6546,10 @@
                     <a:p>
                       <a:pPr algn="ctr" latinLnBrk="1"/>
                       <a:r>
-                        <a:rPr lang="en-US" altLang="ko-KR" sz="1200"/>
+                        <a:rPr lang="en-US" altLang="ko-KR" sz="800" dirty="0"/>
                         <a:t>VARCHAR2(200)</a:t>
                       </a:r>
-                      <a:endParaRPr lang="ko-KR" altLang="en-US" sz="1200" dirty="0"/>
+                      <a:endParaRPr lang="ko-KR" altLang="en-US" sz="800" dirty="0"/>
                     </a:p>
                   </a:txBody>
                   <a:tcPr/>
@@ -6885,7 +6561,7 @@
                     <a:p>
                       <a:pPr algn="ctr" latinLnBrk="1"/>
                       <a:r>
-                        <a:rPr lang="ko-KR" altLang="en-US" sz="1200" dirty="0"/>
+                        <a:rPr lang="ko-KR" altLang="en-US" sz="800" dirty="0"/>
                         <a:t>게시글 제목</a:t>
                       </a:r>
                     </a:p>
@@ -6898,18 +6574,18 @@
                   </a:ext>
                 </a:extLst>
               </a:tr>
-              <a:tr h="166072">
-                <a:tc>
-                  <a:txBody>
-                    <a:bodyPr/>
-                    <a:lstStyle/>
-                    <a:p>
-                      <a:pPr algn="ctr" latinLnBrk="1"/>
-                      <a:r>
-                        <a:rPr lang="en-US" altLang="ko-KR" sz="1200" dirty="0"/>
+              <a:tr h="147441">
+                <a:tc>
+                  <a:txBody>
+                    <a:bodyPr/>
+                    <a:lstStyle/>
+                    <a:p>
+                      <a:pPr algn="ctr" latinLnBrk="1"/>
+                      <a:r>
+                        <a:rPr lang="en-US" altLang="ko-KR" sz="800" dirty="0"/>
                         <a:t>COM_CONTENT</a:t>
                       </a:r>
-                      <a:endParaRPr lang="ko-KR" altLang="en-US" sz="1200" dirty="0"/>
+                      <a:endParaRPr lang="ko-KR" altLang="en-US" sz="800" dirty="0"/>
                     </a:p>
                   </a:txBody>
                   <a:tcPr/>
@@ -6921,10 +6597,10 @@
                     <a:p>
                       <a:pPr algn="ctr" latinLnBrk="1"/>
                       <a:r>
-                        <a:rPr lang="en-US" altLang="ko-KR" sz="1200"/>
+                        <a:rPr lang="en-US" altLang="ko-KR" sz="800" dirty="0"/>
                         <a:t>CLOB</a:t>
                       </a:r>
-                      <a:endParaRPr lang="ko-KR" altLang="en-US" sz="1200" dirty="0"/>
+                      <a:endParaRPr lang="ko-KR" altLang="en-US" sz="800" dirty="0"/>
                     </a:p>
                   </a:txBody>
                   <a:tcPr/>
@@ -6936,7 +6612,7 @@
                     <a:p>
                       <a:pPr algn="ctr" latinLnBrk="1"/>
                       <a:r>
-                        <a:rPr lang="ko-KR" altLang="en-US" sz="1200" dirty="0"/>
+                        <a:rPr lang="ko-KR" altLang="en-US" sz="800" dirty="0"/>
                         <a:t>게시글 내용</a:t>
                       </a:r>
                     </a:p>
@@ -6949,18 +6625,18 @@
                   </a:ext>
                 </a:extLst>
               </a:tr>
-              <a:tr h="166072">
-                <a:tc>
-                  <a:txBody>
-                    <a:bodyPr/>
-                    <a:lstStyle/>
-                    <a:p>
-                      <a:pPr algn="ctr" latinLnBrk="1"/>
-                      <a:r>
-                        <a:rPr lang="en-US" altLang="ko-KR" sz="1200" dirty="0"/>
+              <a:tr h="147441">
+                <a:tc>
+                  <a:txBody>
+                    <a:bodyPr/>
+                    <a:lstStyle/>
+                    <a:p>
+                      <a:pPr algn="ctr" latinLnBrk="1"/>
+                      <a:r>
+                        <a:rPr lang="en-US" altLang="ko-KR" sz="800" dirty="0"/>
                         <a:t>COM_VIEW</a:t>
                       </a:r>
-                      <a:endParaRPr lang="ko-KR" altLang="en-US" sz="1200" dirty="0"/>
+                      <a:endParaRPr lang="ko-KR" altLang="en-US" sz="800" dirty="0"/>
                     </a:p>
                   </a:txBody>
                   <a:tcPr/>
@@ -6972,10 +6648,10 @@
                     <a:p>
                       <a:pPr algn="ctr" latinLnBrk="1"/>
                       <a:r>
-                        <a:rPr lang="en-US" altLang="ko-KR" sz="1200" dirty="0"/>
+                        <a:rPr lang="en-US" altLang="ko-KR" sz="800" dirty="0"/>
                         <a:t>NUMBER</a:t>
                       </a:r>
-                      <a:endParaRPr lang="ko-KR" altLang="en-US" sz="1200" dirty="0"/>
+                      <a:endParaRPr lang="ko-KR" altLang="en-US" sz="800" dirty="0"/>
                     </a:p>
                   </a:txBody>
                   <a:tcPr/>
@@ -6987,7 +6663,7 @@
                     <a:p>
                       <a:pPr algn="ctr" latinLnBrk="1"/>
                       <a:r>
-                        <a:rPr lang="ko-KR" altLang="en-US" sz="1200" dirty="0"/>
+                        <a:rPr lang="ko-KR" altLang="en-US" sz="800" dirty="0"/>
                         <a:t>조회수</a:t>
                       </a:r>
                     </a:p>
@@ -7000,18 +6676,18 @@
                   </a:ext>
                 </a:extLst>
               </a:tr>
-              <a:tr h="166072">
-                <a:tc>
-                  <a:txBody>
-                    <a:bodyPr/>
-                    <a:lstStyle/>
-                    <a:p>
-                      <a:pPr algn="ctr" latinLnBrk="1"/>
-                      <a:r>
-                        <a:rPr lang="en-US" altLang="ko-KR" sz="1200" dirty="0"/>
+              <a:tr h="147441">
+                <a:tc>
+                  <a:txBody>
+                    <a:bodyPr/>
+                    <a:lstStyle/>
+                    <a:p>
+                      <a:pPr algn="ctr" latinLnBrk="1"/>
+                      <a:r>
+                        <a:rPr lang="en-US" altLang="ko-KR" sz="800" dirty="0"/>
                         <a:t>COM_LIKE</a:t>
                       </a:r>
-                      <a:endParaRPr lang="ko-KR" altLang="en-US" sz="1200" dirty="0"/>
+                      <a:endParaRPr lang="ko-KR" altLang="en-US" sz="800" dirty="0"/>
                     </a:p>
                   </a:txBody>
                   <a:tcPr/>
@@ -7023,10 +6699,10 @@
                     <a:p>
                       <a:pPr algn="ctr" latinLnBrk="1"/>
                       <a:r>
-                        <a:rPr lang="en-US" altLang="ko-KR" sz="1200" dirty="0"/>
+                        <a:rPr lang="en-US" altLang="ko-KR" sz="800" dirty="0"/>
                         <a:t>NUMBER</a:t>
                       </a:r>
-                      <a:endParaRPr lang="ko-KR" altLang="en-US" sz="1200" dirty="0"/>
+                      <a:endParaRPr lang="ko-KR" altLang="en-US" sz="800" dirty="0"/>
                     </a:p>
                   </a:txBody>
                   <a:tcPr/>
@@ -7038,7 +6714,7 @@
                     <a:p>
                       <a:pPr algn="ctr" latinLnBrk="1"/>
                       <a:r>
-                        <a:rPr lang="ko-KR" altLang="en-US" sz="1200" dirty="0"/>
+                        <a:rPr lang="ko-KR" altLang="en-US" sz="800" dirty="0"/>
                         <a:t>좋아요 수</a:t>
                       </a:r>
                     </a:p>
@@ -7051,18 +6727,18 @@
                   </a:ext>
                 </a:extLst>
               </a:tr>
-              <a:tr h="166072">
-                <a:tc>
-                  <a:txBody>
-                    <a:bodyPr/>
-                    <a:lstStyle/>
-                    <a:p>
-                      <a:pPr algn="ctr" latinLnBrk="1"/>
-                      <a:r>
-                        <a:rPr lang="en-US" altLang="ko-KR" sz="1200" dirty="0"/>
+              <a:tr h="147441">
+                <a:tc>
+                  <a:txBody>
+                    <a:bodyPr/>
+                    <a:lstStyle/>
+                    <a:p>
+                      <a:pPr algn="ctr" latinLnBrk="1"/>
+                      <a:r>
+                        <a:rPr lang="en-US" altLang="ko-KR" sz="800" dirty="0"/>
                         <a:t>COM_CREATED</a:t>
                       </a:r>
-                      <a:endParaRPr lang="ko-KR" altLang="en-US" sz="1200" dirty="0"/>
+                      <a:endParaRPr lang="ko-KR" altLang="en-US" sz="800" dirty="0"/>
                     </a:p>
                   </a:txBody>
                   <a:tcPr/>
@@ -7074,10 +6750,10 @@
                     <a:p>
                       <a:pPr algn="ctr" latinLnBrk="1"/>
                       <a:r>
-                        <a:rPr lang="en-US" altLang="ko-KR" sz="1200" dirty="0"/>
+                        <a:rPr lang="en-US" altLang="ko-KR" sz="800" dirty="0"/>
                         <a:t>DATE</a:t>
                       </a:r>
-                      <a:endParaRPr lang="ko-KR" altLang="en-US" sz="1200" dirty="0"/>
+                      <a:endParaRPr lang="ko-KR" altLang="en-US" sz="800" dirty="0"/>
                     </a:p>
                   </a:txBody>
                   <a:tcPr/>
@@ -7089,7 +6765,7 @@
                     <a:p>
                       <a:pPr algn="ctr" latinLnBrk="1"/>
                       <a:r>
-                        <a:rPr lang="ko-KR" altLang="en-US" sz="1200" dirty="0"/>
+                        <a:rPr lang="ko-KR" altLang="en-US" sz="800" dirty="0"/>
                         <a:t>작성일</a:t>
                       </a:r>
                     </a:p>
@@ -7123,8 +6799,8 @@
         </p:nvCxnSpPr>
         <p:spPr>
           <a:xfrm>
-            <a:off x="2700866" y="3158013"/>
-            <a:ext cx="10" cy="980491"/>
+            <a:off x="2700865" y="1687251"/>
+            <a:ext cx="0" cy="691061"/>
           </a:xfrm>
           <a:prstGeom prst="line">
             <a:avLst/>
@@ -7162,7 +6838,7 @@
         </p:nvCxnSpPr>
         <p:spPr>
           <a:xfrm flipH="1">
-            <a:off x="2573877" y="4138504"/>
+            <a:off x="2580233" y="2370545"/>
             <a:ext cx="110055" cy="50802"/>
           </a:xfrm>
           <a:prstGeom prst="line">
@@ -7200,7 +6876,7 @@
         </p:nvCxnSpPr>
         <p:spPr>
           <a:xfrm>
-            <a:off x="2692400" y="4121570"/>
+            <a:off x="2698756" y="2353611"/>
             <a:ext cx="127000" cy="67736"/>
           </a:xfrm>
           <a:prstGeom prst="line">
@@ -7238,7 +6914,7 @@
         </p:nvCxnSpPr>
         <p:spPr>
           <a:xfrm>
-            <a:off x="4910667" y="2175933"/>
+            <a:off x="4895310" y="1282064"/>
             <a:ext cx="1989666" cy="1744134"/>
           </a:xfrm>
           <a:prstGeom prst="bentConnector3">
@@ -7277,7 +6953,7 @@
         </p:nvCxnSpPr>
         <p:spPr>
           <a:xfrm flipV="1">
-            <a:off x="6900333" y="3819450"/>
+            <a:off x="6900333" y="2913516"/>
             <a:ext cx="95257" cy="100618"/>
           </a:xfrm>
           <a:prstGeom prst="line">
@@ -7315,7 +6991,7 @@
         </p:nvCxnSpPr>
         <p:spPr>
           <a:xfrm>
-            <a:off x="6900333" y="3928534"/>
+            <a:off x="6900333" y="3022600"/>
             <a:ext cx="97362" cy="88052"/>
           </a:xfrm>
           <a:prstGeom prst="line">
@@ -7351,7 +7027,7 @@
         </p:nvSpPr>
         <p:spPr>
           <a:xfrm flipH="1">
-            <a:off x="4847177" y="1962078"/>
+            <a:off x="4864604" y="1095796"/>
             <a:ext cx="194730" cy="215444"/>
           </a:xfrm>
           <a:prstGeom prst="rect">
@@ -7387,7 +7063,7 @@
         </p:nvSpPr>
         <p:spPr>
           <a:xfrm flipH="1">
-            <a:off x="6737355" y="3711728"/>
+            <a:off x="6726240" y="2822817"/>
             <a:ext cx="194730" cy="215444"/>
           </a:xfrm>
           <a:prstGeom prst="rect">
@@ -7411,59 +7087,10 @@
       </p:sp>
       <p:sp>
         <p:nvSpPr>
-          <p:cNvPr id="49" name="타원 48">
-            <a:extLst>
-              <a:ext uri="{FF2B5EF4-FFF2-40B4-BE49-F238E27FC236}">
-                <a16:creationId xmlns:a16="http://schemas.microsoft.com/office/drawing/2014/main" id="{336D7016-C9F3-464D-B51D-781234CC319D}"/>
-              </a:ext>
-            </a:extLst>
-          </p:cNvPr>
-          <p:cNvSpPr/>
-          <p:nvPr/>
-        </p:nvSpPr>
-        <p:spPr>
-          <a:xfrm>
-            <a:off x="4927609" y="2134960"/>
-            <a:ext cx="78314" cy="93364"/>
-          </a:xfrm>
-          <a:prstGeom prst="ellipse">
-            <a:avLst/>
-          </a:prstGeom>
-          <a:solidFill>
-            <a:schemeClr val="bg1"/>
-          </a:solidFill>
-        </p:spPr>
-        <p:style>
-          <a:lnRef idx="2">
-            <a:schemeClr val="accent1">
-              <a:shade val="50000"/>
-            </a:schemeClr>
-          </a:lnRef>
-          <a:fillRef idx="1">
-            <a:schemeClr val="accent1"/>
-          </a:fillRef>
-          <a:effectRef idx="0">
-            <a:schemeClr val="accent1"/>
-          </a:effectRef>
-          <a:fontRef idx="minor">
-            <a:schemeClr val="lt1"/>
-          </a:fontRef>
-        </p:style>
-        <p:txBody>
-          <a:bodyPr rtlCol="0" anchor="ctr"/>
-          <a:lstStyle/>
-          <a:p>
-            <a:pPr algn="ctr"/>
-            <a:endParaRPr lang="ko-KR" altLang="en-US"/>
-          </a:p>
-        </p:txBody>
-      </p:sp>
-      <p:sp>
-        <p:nvSpPr>
-          <p:cNvPr id="57" name="TextBox 56">
-            <a:extLst>
-              <a:ext uri="{FF2B5EF4-FFF2-40B4-BE49-F238E27FC236}">
-                <a16:creationId xmlns:a16="http://schemas.microsoft.com/office/drawing/2014/main" id="{65459688-714E-4F6C-A6B6-93FF0C742210}"/>
+          <p:cNvPr id="27" name="TextBox 26">
+            <a:extLst>
+              <a:ext uri="{FF2B5EF4-FFF2-40B4-BE49-F238E27FC236}">
+                <a16:creationId xmlns:a16="http://schemas.microsoft.com/office/drawing/2014/main" id="{44409B00-437D-4D5E-9463-39E574AB914C}"/>
               </a:ext>
             </a:extLst>
           </p:cNvPr>
@@ -7472,7 +7099,7 @@
         </p:nvSpPr>
         <p:spPr>
           <a:xfrm flipH="1">
-            <a:off x="2654299" y="3082849"/>
+            <a:off x="2672807" y="1652878"/>
             <a:ext cx="194730" cy="215444"/>
           </a:xfrm>
           <a:prstGeom prst="rect">
@@ -7496,10 +7123,10 @@
       </p:sp>
       <p:sp>
         <p:nvSpPr>
-          <p:cNvPr id="58" name="TextBox 57">
-            <a:extLst>
-              <a:ext uri="{FF2B5EF4-FFF2-40B4-BE49-F238E27FC236}">
-                <a16:creationId xmlns:a16="http://schemas.microsoft.com/office/drawing/2014/main" id="{0B98808B-19AA-4FE7-96D3-B02E7EE70398}"/>
+          <p:cNvPr id="28" name="TextBox 27">
+            <a:extLst>
+              <a:ext uri="{FF2B5EF4-FFF2-40B4-BE49-F238E27FC236}">
+                <a16:creationId xmlns:a16="http://schemas.microsoft.com/office/drawing/2014/main" id="{8EEBC869-0971-4441-98E4-FB22BAD956BA}"/>
               </a:ext>
             </a:extLst>
           </p:cNvPr>
@@ -7508,7 +7135,7 @@
         </p:nvSpPr>
         <p:spPr>
           <a:xfrm flipH="1">
-            <a:off x="2671230" y="3979269"/>
+            <a:off x="2675481" y="2197398"/>
             <a:ext cx="194730" cy="215444"/>
           </a:xfrm>
           <a:prstGeom prst="rect">
@@ -7530,54 +7157,632 @@
           </a:p>
         </p:txBody>
       </p:sp>
-    </p:spTree>
-    <p:extLst>
-      <p:ext uri="{BB962C8B-B14F-4D97-AF65-F5344CB8AC3E}">
-        <p14:creationId xmlns:p14="http://schemas.microsoft.com/office/powerpoint/2010/main" val="3690327821"/>
-      </p:ext>
-    </p:extLst>
-  </p:cSld>
-  <p:clrMapOvr>
-    <a:masterClrMapping/>
-  </p:clrMapOvr>
-</p:sld>
-</file>
-
-<file path=ppt/slides/slide2.xml><?xml version="1.0" encoding="utf-8"?>
-<p:sld xmlns:a="http://schemas.openxmlformats.org/drawingml/2006/main" xmlns:r="http://schemas.openxmlformats.org/officeDocument/2006/relationships" xmlns:p="http://schemas.openxmlformats.org/presentationml/2006/main">
-  <p:cSld>
-    <p:spTree>
-      <p:nvGrpSpPr>
-        <p:cNvPr id="1" name=""/>
-        <p:cNvGrpSpPr/>
-        <p:nvPr/>
-      </p:nvGrpSpPr>
-      <p:grpSpPr>
-        <a:xfrm>
-          <a:off x="0" y="0"/>
-          <a:ext cx="0" cy="0"/>
-          <a:chOff x="0" y="0"/>
-          <a:chExt cx="0" cy="0"/>
-        </a:xfrm>
-      </p:grpSpPr>
+      <p:graphicFrame>
+        <p:nvGraphicFramePr>
+          <p:cNvPr id="12" name="표 11">
+            <a:extLst>
+              <a:ext uri="{FF2B5EF4-FFF2-40B4-BE49-F238E27FC236}">
+                <a16:creationId xmlns:a16="http://schemas.microsoft.com/office/drawing/2014/main" id="{33D7F776-BD2E-4666-A91D-F4D8865884EB}"/>
+              </a:ext>
+            </a:extLst>
+          </p:cNvPr>
+          <p:cNvGraphicFramePr>
+            <a:graphicFrameLocks noGrp="1"/>
+          </p:cNvGraphicFramePr>
+          <p:nvPr>
+            <p:extLst>
+              <p:ext uri="{D42A27DB-BD31-4B8C-83A1-F6EECF244321}">
+                <p14:modId xmlns:p14="http://schemas.microsoft.com/office/powerpoint/2010/main" val="2694325727"/>
+              </p:ext>
+            </p:extLst>
+          </p:nvPr>
+        </p:nvGraphicFramePr>
+        <p:xfrm>
+          <a:off x="506428" y="4664366"/>
+          <a:ext cx="4384656" cy="1280160"/>
+        </p:xfrm>
+        <a:graphic>
+          <a:graphicData uri="http://schemas.openxmlformats.org/drawingml/2006/table">
+            <a:tbl>
+              <a:tblPr firstRow="1" bandRow="1">
+                <a:tableStyleId>{46F890A9-2807-4EBB-B81D-B2AA78EC7F39}</a:tableStyleId>
+              </a:tblPr>
+              <a:tblGrid>
+                <a:gridCol w="1461552">
+                  <a:extLst>
+                    <a:ext uri="{9D8B030D-6E8A-4147-A177-3AD203B41FA5}">
+                      <a16:colId xmlns:a16="http://schemas.microsoft.com/office/drawing/2014/main" val="2756051526"/>
+                    </a:ext>
+                  </a:extLst>
+                </a:gridCol>
+                <a:gridCol w="1461552">
+                  <a:extLst>
+                    <a:ext uri="{9D8B030D-6E8A-4147-A177-3AD203B41FA5}">
+                      <a16:colId xmlns:a16="http://schemas.microsoft.com/office/drawing/2014/main" val="3649046412"/>
+                    </a:ext>
+                  </a:extLst>
+                </a:gridCol>
+                <a:gridCol w="1461552">
+                  <a:extLst>
+                    <a:ext uri="{9D8B030D-6E8A-4147-A177-3AD203B41FA5}">
+                      <a16:colId xmlns:a16="http://schemas.microsoft.com/office/drawing/2014/main" val="292045944"/>
+                    </a:ext>
+                  </a:extLst>
+                </a:gridCol>
+              </a:tblGrid>
+              <a:tr h="144739">
+                <a:tc gridSpan="3">
+                  <a:txBody>
+                    <a:bodyPr/>
+                    <a:lstStyle/>
+                    <a:p>
+                      <a:pPr algn="ctr" latinLnBrk="1"/>
+                      <a:r>
+                        <a:rPr lang="en-US" altLang="ko-KR" sz="800" dirty="0"/>
+                        <a:t>COMMENT</a:t>
+                      </a:r>
+                      <a:endParaRPr lang="ko-KR" altLang="en-US" sz="800" dirty="0"/>
+                    </a:p>
+                  </a:txBody>
+                  <a:tcPr anchor="ctr"/>
+                </a:tc>
+                <a:tc hMerge="1">
+                  <a:txBody>
+                    <a:bodyPr/>
+                    <a:lstStyle/>
+                    <a:p>
+                      <a:pPr latinLnBrk="1"/>
+                      <a:endParaRPr lang="ko-KR" altLang="en-US" sz="1000" dirty="0"/>
+                    </a:p>
+                  </a:txBody>
+                  <a:tcPr/>
+                </a:tc>
+                <a:tc hMerge="1">
+                  <a:txBody>
+                    <a:bodyPr/>
+                    <a:lstStyle/>
+                    <a:p>
+                      <a:pPr latinLnBrk="1"/>
+                      <a:endParaRPr lang="ko-KR" altLang="en-US" sz="1000" dirty="0"/>
+                    </a:p>
+                  </a:txBody>
+                  <a:tcPr/>
+                </a:tc>
+                <a:extLst>
+                  <a:ext uri="{0D108BD9-81ED-4DB2-BD59-A6C34878D82A}">
+                    <a16:rowId xmlns:a16="http://schemas.microsoft.com/office/drawing/2014/main" val="3490623324"/>
+                  </a:ext>
+                </a:extLst>
+              </a:tr>
+              <a:tr h="209853">
+                <a:tc>
+                  <a:txBody>
+                    <a:bodyPr/>
+                    <a:lstStyle/>
+                    <a:p>
+                      <a:pPr algn="ctr" latinLnBrk="1"/>
+                      <a:r>
+                        <a:rPr lang="ko-KR" altLang="en-US" sz="800" dirty="0" err="1"/>
+                        <a:t>컬럼명</a:t>
+                      </a:r>
+                      <a:endParaRPr lang="ko-KR" altLang="en-US" sz="800" dirty="0"/>
+                    </a:p>
+                  </a:txBody>
+                  <a:tcPr anchor="ctr"/>
+                </a:tc>
+                <a:tc>
+                  <a:txBody>
+                    <a:bodyPr/>
+                    <a:lstStyle/>
+                    <a:p>
+                      <a:pPr algn="ctr" latinLnBrk="1"/>
+                      <a:r>
+                        <a:rPr lang="ko-KR" altLang="en-US" sz="800" dirty="0"/>
+                        <a:t>타입</a:t>
+                      </a:r>
+                    </a:p>
+                  </a:txBody>
+                  <a:tcPr anchor="ctr"/>
+                </a:tc>
+                <a:tc>
+                  <a:txBody>
+                    <a:bodyPr/>
+                    <a:lstStyle/>
+                    <a:p>
+                      <a:pPr algn="ctr" latinLnBrk="1"/>
+                      <a:r>
+                        <a:rPr lang="ko-KR" altLang="en-US" sz="800" dirty="0"/>
+                        <a:t>설명</a:t>
+                      </a:r>
+                    </a:p>
+                  </a:txBody>
+                  <a:tcPr anchor="ctr"/>
+                </a:tc>
+                <a:extLst>
+                  <a:ext uri="{0D108BD9-81ED-4DB2-BD59-A6C34878D82A}">
+                    <a16:rowId xmlns:a16="http://schemas.microsoft.com/office/drawing/2014/main" val="2340640162"/>
+                  </a:ext>
+                </a:extLst>
+              </a:tr>
+              <a:tr h="144739">
+                <a:tc>
+                  <a:txBody>
+                    <a:bodyPr/>
+                    <a:lstStyle/>
+                    <a:p>
+                      <a:pPr algn="ctr" latinLnBrk="1"/>
+                      <a:r>
+                        <a:rPr lang="en-US" altLang="ko-KR" sz="800" dirty="0"/>
+                        <a:t>COM_ID(PK, FK)</a:t>
+                      </a:r>
+                      <a:endParaRPr lang="ko-KR" altLang="en-US" sz="800" dirty="0"/>
+                    </a:p>
+                  </a:txBody>
+                  <a:tcPr anchor="ctr"/>
+                </a:tc>
+                <a:tc>
+                  <a:txBody>
+                    <a:bodyPr/>
+                    <a:lstStyle/>
+                    <a:p>
+                      <a:pPr algn="ctr" latinLnBrk="1"/>
+                      <a:r>
+                        <a:rPr lang="en-US" altLang="ko-KR" sz="800" dirty="0"/>
+                        <a:t>NUMBER</a:t>
+                      </a:r>
+                      <a:endParaRPr lang="ko-KR" altLang="en-US" sz="800" dirty="0"/>
+                    </a:p>
+                  </a:txBody>
+                  <a:tcPr anchor="ctr"/>
+                </a:tc>
+                <a:tc>
+                  <a:txBody>
+                    <a:bodyPr/>
+                    <a:lstStyle/>
+                    <a:p>
+                      <a:pPr algn="ctr" latinLnBrk="1"/>
+                      <a:r>
+                        <a:rPr lang="ko-KR" altLang="en-US" sz="800" dirty="0"/>
+                        <a:t>게시글 번호</a:t>
+                      </a:r>
+                    </a:p>
+                  </a:txBody>
+                  <a:tcPr anchor="ctr"/>
+                </a:tc>
+                <a:extLst>
+                  <a:ext uri="{0D108BD9-81ED-4DB2-BD59-A6C34878D82A}">
+                    <a16:rowId xmlns:a16="http://schemas.microsoft.com/office/drawing/2014/main" val="2443346301"/>
+                  </a:ext>
+                </a:extLst>
+              </a:tr>
+              <a:tr h="144739">
+                <a:tc>
+                  <a:txBody>
+                    <a:bodyPr/>
+                    <a:lstStyle/>
+                    <a:p>
+                      <a:pPr algn="ctr" latinLnBrk="1"/>
+                      <a:r>
+                        <a:rPr lang="en-US" altLang="ko-KR" sz="800" dirty="0"/>
+                        <a:t>MEM_ID(PK, FK)</a:t>
+                      </a:r>
+                      <a:endParaRPr lang="ko-KR" altLang="en-US" sz="800" dirty="0"/>
+                    </a:p>
+                  </a:txBody>
+                  <a:tcPr anchor="ctr"/>
+                </a:tc>
+                <a:tc>
+                  <a:txBody>
+                    <a:bodyPr/>
+                    <a:lstStyle/>
+                    <a:p>
+                      <a:pPr algn="ctr" latinLnBrk="1"/>
+                      <a:r>
+                        <a:rPr lang="en-US" altLang="ko-KR" sz="800" dirty="0"/>
+                        <a:t>VARCHAR2(50)</a:t>
+                      </a:r>
+                      <a:endParaRPr lang="ko-KR" altLang="en-US" sz="800" dirty="0"/>
+                    </a:p>
+                  </a:txBody>
+                  <a:tcPr anchor="ctr"/>
+                </a:tc>
+                <a:tc>
+                  <a:txBody>
+                    <a:bodyPr/>
+                    <a:lstStyle/>
+                    <a:p>
+                      <a:pPr algn="ctr" latinLnBrk="1"/>
+                      <a:r>
+                        <a:rPr lang="ko-KR" altLang="en-US" sz="800" dirty="0"/>
+                        <a:t>작성자 </a:t>
+                      </a:r>
+                      <a:r>
+                        <a:rPr lang="en-US" altLang="ko-KR" sz="800" dirty="0"/>
+                        <a:t>ID</a:t>
+                      </a:r>
+                      <a:endParaRPr lang="ko-KR" altLang="en-US" sz="800" dirty="0"/>
+                    </a:p>
+                  </a:txBody>
+                  <a:tcPr anchor="ctr"/>
+                </a:tc>
+                <a:extLst>
+                  <a:ext uri="{0D108BD9-81ED-4DB2-BD59-A6C34878D82A}">
+                    <a16:rowId xmlns:a16="http://schemas.microsoft.com/office/drawing/2014/main" val="476276053"/>
+                  </a:ext>
+                </a:extLst>
+              </a:tr>
+              <a:tr h="144739">
+                <a:tc>
+                  <a:txBody>
+                    <a:bodyPr/>
+                    <a:lstStyle/>
+                    <a:p>
+                      <a:pPr algn="ctr" latinLnBrk="1"/>
+                      <a:r>
+                        <a:rPr lang="en-US" altLang="ko-KR" sz="800" dirty="0"/>
+                        <a:t>COMMENT_CREATED(PK)</a:t>
+                      </a:r>
+                      <a:endParaRPr lang="ko-KR" altLang="en-US" sz="800" dirty="0"/>
+                    </a:p>
+                  </a:txBody>
+                  <a:tcPr anchor="ctr"/>
+                </a:tc>
+                <a:tc>
+                  <a:txBody>
+                    <a:bodyPr/>
+                    <a:lstStyle/>
+                    <a:p>
+                      <a:pPr marL="0" marR="0" lvl="0" indent="0" algn="ctr" defTabSz="914400" rtl="0" eaLnBrk="1" fontAlgn="auto" latinLnBrk="1" hangingPunct="1">
+                        <a:lnSpc>
+                          <a:spcPct val="100000"/>
+                        </a:lnSpc>
+                        <a:spcBef>
+                          <a:spcPts val="0"/>
+                        </a:spcBef>
+                        <a:spcAft>
+                          <a:spcPts val="0"/>
+                        </a:spcAft>
+                        <a:buClrTx/>
+                        <a:buSzTx/>
+                        <a:buFontTx/>
+                        <a:buNone/>
+                        <a:tabLst/>
+                        <a:defRPr/>
+                      </a:pPr>
+                      <a:r>
+                        <a:rPr lang="en-US" altLang="ko-KR" sz="800" dirty="0"/>
+                        <a:t>DATE</a:t>
+                      </a:r>
+                      <a:endParaRPr lang="ko-KR" altLang="en-US" sz="800" dirty="0"/>
+                    </a:p>
+                  </a:txBody>
+                  <a:tcPr anchor="ctr"/>
+                </a:tc>
+                <a:tc>
+                  <a:txBody>
+                    <a:bodyPr/>
+                    <a:lstStyle/>
+                    <a:p>
+                      <a:pPr marL="0" marR="0" lvl="0" indent="0" algn="ctr" defTabSz="914400" rtl="0" eaLnBrk="1" fontAlgn="auto" latinLnBrk="1" hangingPunct="1">
+                        <a:lnSpc>
+                          <a:spcPct val="100000"/>
+                        </a:lnSpc>
+                        <a:spcBef>
+                          <a:spcPts val="0"/>
+                        </a:spcBef>
+                        <a:spcAft>
+                          <a:spcPts val="0"/>
+                        </a:spcAft>
+                        <a:buClrTx/>
+                        <a:buSzTx/>
+                        <a:buFontTx/>
+                        <a:buNone/>
+                        <a:tabLst/>
+                        <a:defRPr/>
+                      </a:pPr>
+                      <a:r>
+                        <a:rPr lang="ko-KR" altLang="en-US" sz="800" dirty="0"/>
+                        <a:t>댓글 작성일시</a:t>
+                      </a:r>
+                    </a:p>
+                  </a:txBody>
+                  <a:tcPr anchor="ctr"/>
+                </a:tc>
+                <a:extLst>
+                  <a:ext uri="{0D108BD9-81ED-4DB2-BD59-A6C34878D82A}">
+                    <a16:rowId xmlns:a16="http://schemas.microsoft.com/office/drawing/2014/main" val="114429227"/>
+                  </a:ext>
+                </a:extLst>
+              </a:tr>
+              <a:tr h="144739">
+                <a:tc>
+                  <a:txBody>
+                    <a:bodyPr/>
+                    <a:lstStyle/>
+                    <a:p>
+                      <a:pPr algn="ctr" latinLnBrk="1"/>
+                      <a:r>
+                        <a:rPr lang="en-US" altLang="ko-KR" sz="800" dirty="0"/>
+                        <a:t>COMMENT_CONTENT</a:t>
+                      </a:r>
+                      <a:endParaRPr lang="ko-KR" altLang="en-US" sz="800" dirty="0"/>
+                    </a:p>
+                  </a:txBody>
+                  <a:tcPr anchor="ctr"/>
+                </a:tc>
+                <a:tc>
+                  <a:txBody>
+                    <a:bodyPr/>
+                    <a:lstStyle/>
+                    <a:p>
+                      <a:pPr marL="0" marR="0" lvl="0" indent="0" algn="ctr" defTabSz="914400" rtl="0" eaLnBrk="1" fontAlgn="auto" latinLnBrk="1" hangingPunct="1">
+                        <a:lnSpc>
+                          <a:spcPct val="100000"/>
+                        </a:lnSpc>
+                        <a:spcBef>
+                          <a:spcPts val="0"/>
+                        </a:spcBef>
+                        <a:spcAft>
+                          <a:spcPts val="0"/>
+                        </a:spcAft>
+                        <a:buClrTx/>
+                        <a:buSzTx/>
+                        <a:buFontTx/>
+                        <a:buNone/>
+                        <a:tabLst/>
+                        <a:defRPr/>
+                      </a:pPr>
+                      <a:r>
+                        <a:rPr lang="en-US" altLang="ko-KR" sz="800" dirty="0"/>
+                        <a:t>VARCHAR2(1000)</a:t>
+                      </a:r>
+                      <a:endParaRPr lang="ko-KR" altLang="en-US" sz="800" dirty="0"/>
+                    </a:p>
+                  </a:txBody>
+                  <a:tcPr anchor="ctr"/>
+                </a:tc>
+                <a:tc>
+                  <a:txBody>
+                    <a:bodyPr/>
+                    <a:lstStyle/>
+                    <a:p>
+                      <a:pPr marL="0" marR="0" lvl="0" indent="0" algn="ctr" defTabSz="914400" rtl="0" eaLnBrk="1" fontAlgn="auto" latinLnBrk="1" hangingPunct="1">
+                        <a:lnSpc>
+                          <a:spcPct val="100000"/>
+                        </a:lnSpc>
+                        <a:spcBef>
+                          <a:spcPts val="0"/>
+                        </a:spcBef>
+                        <a:spcAft>
+                          <a:spcPts val="0"/>
+                        </a:spcAft>
+                        <a:buClrTx/>
+                        <a:buSzTx/>
+                        <a:buFontTx/>
+                        <a:buNone/>
+                        <a:tabLst/>
+                        <a:defRPr/>
+                      </a:pPr>
+                      <a:r>
+                        <a:rPr lang="ko-KR" altLang="en-US" sz="800" dirty="0"/>
+                        <a:t>댓글 내용</a:t>
+                      </a:r>
+                    </a:p>
+                  </a:txBody>
+                  <a:tcPr anchor="ctr"/>
+                </a:tc>
+                <a:extLst>
+                  <a:ext uri="{0D108BD9-81ED-4DB2-BD59-A6C34878D82A}">
+                    <a16:rowId xmlns:a16="http://schemas.microsoft.com/office/drawing/2014/main" val="651369099"/>
+                  </a:ext>
+                </a:extLst>
+              </a:tr>
+            </a:tbl>
+          </a:graphicData>
+        </a:graphic>
+      </p:graphicFrame>
+      <p:cxnSp>
+        <p:nvCxnSpPr>
+          <p:cNvPr id="24" name="직선 연결선 23">
+            <a:extLst>
+              <a:ext uri="{FF2B5EF4-FFF2-40B4-BE49-F238E27FC236}">
+                <a16:creationId xmlns:a16="http://schemas.microsoft.com/office/drawing/2014/main" id="{D919A32A-F8CB-404F-AE35-A5E1143751A0}"/>
+              </a:ext>
+            </a:extLst>
+          </p:cNvPr>
+          <p:cNvCxnSpPr/>
+          <p:nvPr/>
+        </p:nvCxnSpPr>
+        <p:spPr>
+          <a:xfrm>
+            <a:off x="4899552" y="913474"/>
+            <a:ext cx="679982" cy="0"/>
+          </a:xfrm>
+          <a:prstGeom prst="line">
+            <a:avLst/>
+          </a:prstGeom>
+        </p:spPr>
+        <p:style>
+          <a:lnRef idx="3">
+            <a:schemeClr val="dk1"/>
+          </a:lnRef>
+          <a:fillRef idx="0">
+            <a:schemeClr val="dk1"/>
+          </a:fillRef>
+          <a:effectRef idx="2">
+            <a:schemeClr val="dk1"/>
+          </a:effectRef>
+          <a:fontRef idx="minor">
+            <a:schemeClr val="tx1"/>
+          </a:fontRef>
+        </p:style>
+      </p:cxnSp>
+      <p:cxnSp>
+        <p:nvCxnSpPr>
+          <p:cNvPr id="32" name="직선 연결선 31">
+            <a:extLst>
+              <a:ext uri="{FF2B5EF4-FFF2-40B4-BE49-F238E27FC236}">
+                <a16:creationId xmlns:a16="http://schemas.microsoft.com/office/drawing/2014/main" id="{B748B9AB-FF20-495F-ACCF-22E08CE1054D}"/>
+              </a:ext>
+            </a:extLst>
+          </p:cNvPr>
+          <p:cNvCxnSpPr/>
+          <p:nvPr/>
+        </p:nvCxnSpPr>
+        <p:spPr>
+          <a:xfrm>
+            <a:off x="5579534" y="913474"/>
+            <a:ext cx="0" cy="4390972"/>
+          </a:xfrm>
+          <a:prstGeom prst="line">
+            <a:avLst/>
+          </a:prstGeom>
+        </p:spPr>
+        <p:style>
+          <a:lnRef idx="3">
+            <a:schemeClr val="dk1"/>
+          </a:lnRef>
+          <a:fillRef idx="0">
+            <a:schemeClr val="dk1"/>
+          </a:fillRef>
+          <a:effectRef idx="2">
+            <a:schemeClr val="dk1"/>
+          </a:effectRef>
+          <a:fontRef idx="minor">
+            <a:schemeClr val="tx1"/>
+          </a:fontRef>
+        </p:style>
+      </p:cxnSp>
+      <p:cxnSp>
+        <p:nvCxnSpPr>
+          <p:cNvPr id="34" name="직선 연결선 33">
+            <a:extLst>
+              <a:ext uri="{FF2B5EF4-FFF2-40B4-BE49-F238E27FC236}">
+                <a16:creationId xmlns:a16="http://schemas.microsoft.com/office/drawing/2014/main" id="{4E13562C-95DE-4722-B988-B265120AF51D}"/>
+              </a:ext>
+            </a:extLst>
+          </p:cNvPr>
+          <p:cNvCxnSpPr>
+            <a:cxnSpLocks/>
+          </p:cNvCxnSpPr>
+          <p:nvPr/>
+        </p:nvCxnSpPr>
+        <p:spPr>
+          <a:xfrm>
+            <a:off x="5033431" y="5304446"/>
+            <a:ext cx="546103" cy="0"/>
+          </a:xfrm>
+          <a:prstGeom prst="line">
+            <a:avLst/>
+          </a:prstGeom>
+        </p:spPr>
+        <p:style>
+          <a:lnRef idx="3">
+            <a:schemeClr val="dk1"/>
+          </a:lnRef>
+          <a:fillRef idx="0">
+            <a:schemeClr val="dk1"/>
+          </a:fillRef>
+          <a:effectRef idx="2">
+            <a:schemeClr val="dk1"/>
+          </a:effectRef>
+          <a:fontRef idx="minor">
+            <a:schemeClr val="tx1"/>
+          </a:fontRef>
+        </p:style>
+      </p:cxnSp>
+      <p:cxnSp>
+        <p:nvCxnSpPr>
+          <p:cNvPr id="37" name="직선 연결선 36">
+            <a:extLst>
+              <a:ext uri="{FF2B5EF4-FFF2-40B4-BE49-F238E27FC236}">
+                <a16:creationId xmlns:a16="http://schemas.microsoft.com/office/drawing/2014/main" id="{A88DD921-AB6E-4163-9769-980749D5EB90}"/>
+              </a:ext>
+            </a:extLst>
+          </p:cNvPr>
+          <p:cNvCxnSpPr>
+            <a:cxnSpLocks/>
+          </p:cNvCxnSpPr>
+          <p:nvPr/>
+        </p:nvCxnSpPr>
+        <p:spPr>
+          <a:xfrm flipH="1" flipV="1">
+            <a:off x="4902118" y="5173133"/>
+            <a:ext cx="131314" cy="131314"/>
+          </a:xfrm>
+          <a:prstGeom prst="line">
+            <a:avLst/>
+          </a:prstGeom>
+        </p:spPr>
+        <p:style>
+          <a:lnRef idx="3">
+            <a:schemeClr val="dk1"/>
+          </a:lnRef>
+          <a:fillRef idx="0">
+            <a:schemeClr val="dk1"/>
+          </a:fillRef>
+          <a:effectRef idx="2">
+            <a:schemeClr val="dk1"/>
+          </a:effectRef>
+          <a:fontRef idx="minor">
+            <a:schemeClr val="tx1"/>
+          </a:fontRef>
+        </p:style>
+      </p:cxnSp>
+      <p:cxnSp>
+        <p:nvCxnSpPr>
+          <p:cNvPr id="39" name="직선 연결선 38">
+            <a:extLst>
+              <a:ext uri="{FF2B5EF4-FFF2-40B4-BE49-F238E27FC236}">
+                <a16:creationId xmlns:a16="http://schemas.microsoft.com/office/drawing/2014/main" id="{9C69E5A9-1EEB-4970-8377-642E20188D7D}"/>
+              </a:ext>
+            </a:extLst>
+          </p:cNvPr>
+          <p:cNvCxnSpPr>
+            <a:cxnSpLocks/>
+          </p:cNvCxnSpPr>
+          <p:nvPr/>
+        </p:nvCxnSpPr>
+        <p:spPr>
+          <a:xfrm flipH="1">
+            <a:off x="4902117" y="5304446"/>
+            <a:ext cx="131315" cy="131314"/>
+          </a:xfrm>
+          <a:prstGeom prst="line">
+            <a:avLst/>
+          </a:prstGeom>
+        </p:spPr>
+        <p:style>
+          <a:lnRef idx="3">
+            <a:schemeClr val="dk1"/>
+          </a:lnRef>
+          <a:fillRef idx="0">
+            <a:schemeClr val="dk1"/>
+          </a:fillRef>
+          <a:effectRef idx="2">
+            <a:schemeClr val="dk1"/>
+          </a:effectRef>
+          <a:fontRef idx="minor">
+            <a:schemeClr val="tx1"/>
+          </a:fontRef>
+        </p:style>
+      </p:cxnSp>
       <p:sp>
         <p:nvSpPr>
-          <p:cNvPr id="4" name="내용 개체 틀 3">
-            <a:extLst>
-              <a:ext uri="{FF2B5EF4-FFF2-40B4-BE49-F238E27FC236}">
-                <a16:creationId xmlns:a16="http://schemas.microsoft.com/office/drawing/2014/main" id="{F956E572-B7DC-4E51-8642-31B810DB6AE1}"/>
-              </a:ext>
-            </a:extLst>
-          </p:cNvPr>
-          <p:cNvSpPr txBox="1">
-            <a:spLocks/>
-          </p:cNvSpPr>
+          <p:cNvPr id="53" name="TextBox 52">
+            <a:extLst>
+              <a:ext uri="{FF2B5EF4-FFF2-40B4-BE49-F238E27FC236}">
+                <a16:creationId xmlns:a16="http://schemas.microsoft.com/office/drawing/2014/main" id="{BDD08791-A8CD-471E-A431-44FCFFEAC63E}"/>
+              </a:ext>
+            </a:extLst>
+          </p:cNvPr>
+          <p:cNvSpPr txBox="1"/>
           <p:nvPr/>
         </p:nvSpPr>
         <p:spPr>
-          <a:xfrm>
-            <a:off x="745079" y="929923"/>
-            <a:ext cx="4682054" cy="2930033"/>
+          <a:xfrm flipH="1">
+            <a:off x="4839211" y="697578"/>
+            <a:ext cx="194730" cy="215444"/>
           </a:xfrm>
           <a:prstGeom prst="rect">
             <a:avLst/>
@@ -7585,322 +7790,59 @@
           <a:noFill/>
         </p:spPr>
         <p:txBody>
-          <a:bodyPr vert="horz" wrap="square" lIns="91440" tIns="45720" rIns="91440" bIns="45720" rtlCol="0">
+          <a:bodyPr wrap="square" rtlCol="0">
             <a:spAutoFit/>
           </a:bodyPr>
-          <a:lstStyle>
-            <a:lvl1pPr marL="0" indent="0" algn="ctr" defTabSz="914400" rtl="0" eaLnBrk="1" latinLnBrk="1" hangingPunct="1">
-              <a:lnSpc>
-                <a:spcPct val="90000"/>
-              </a:lnSpc>
-              <a:spcBef>
-                <a:spcPts val="1000"/>
-              </a:spcBef>
-              <a:buFont typeface="Arial" panose="020B0604020202020204" pitchFamily="34" charset="0"/>
-              <a:buNone/>
-              <a:defRPr sz="2400" kern="1200">
-                <a:solidFill>
-                  <a:schemeClr val="tx1"/>
-                </a:solidFill>
-                <a:latin typeface="+mn-lt"/>
-                <a:ea typeface="+mn-ea"/>
-                <a:cs typeface="+mn-cs"/>
-              </a:defRPr>
-            </a:lvl1pPr>
-            <a:lvl2pPr marL="457200" indent="0" algn="ctr" defTabSz="914400" rtl="0" eaLnBrk="1" latinLnBrk="1" hangingPunct="1">
-              <a:lnSpc>
-                <a:spcPct val="90000"/>
-              </a:lnSpc>
-              <a:spcBef>
-                <a:spcPts val="500"/>
-              </a:spcBef>
-              <a:buFont typeface="Arial" panose="020B0604020202020204" pitchFamily="34" charset="0"/>
-              <a:buNone/>
-              <a:defRPr sz="2000" kern="1200">
-                <a:solidFill>
-                  <a:schemeClr val="tx1"/>
-                </a:solidFill>
-                <a:latin typeface="+mn-lt"/>
-                <a:ea typeface="+mn-ea"/>
-                <a:cs typeface="+mn-cs"/>
-              </a:defRPr>
-            </a:lvl2pPr>
-            <a:lvl3pPr marL="914400" indent="0" algn="ctr" defTabSz="914400" rtl="0" eaLnBrk="1" latinLnBrk="1" hangingPunct="1">
-              <a:lnSpc>
-                <a:spcPct val="90000"/>
-              </a:lnSpc>
-              <a:spcBef>
-                <a:spcPts val="500"/>
-              </a:spcBef>
-              <a:buFont typeface="Arial" panose="020B0604020202020204" pitchFamily="34" charset="0"/>
-              <a:buNone/>
-              <a:defRPr sz="1800" kern="1200">
-                <a:solidFill>
-                  <a:schemeClr val="tx1"/>
-                </a:solidFill>
-                <a:latin typeface="+mn-lt"/>
-                <a:ea typeface="+mn-ea"/>
-                <a:cs typeface="+mn-cs"/>
-              </a:defRPr>
-            </a:lvl3pPr>
-            <a:lvl4pPr marL="1371600" indent="0" algn="ctr" defTabSz="914400" rtl="0" eaLnBrk="1" latinLnBrk="1" hangingPunct="1">
-              <a:lnSpc>
-                <a:spcPct val="90000"/>
-              </a:lnSpc>
-              <a:spcBef>
-                <a:spcPts val="500"/>
-              </a:spcBef>
-              <a:buFont typeface="Arial" panose="020B0604020202020204" pitchFamily="34" charset="0"/>
-              <a:buNone/>
-              <a:defRPr sz="1600" kern="1200">
-                <a:solidFill>
-                  <a:schemeClr val="tx1"/>
-                </a:solidFill>
-                <a:latin typeface="+mn-lt"/>
-                <a:ea typeface="+mn-ea"/>
-                <a:cs typeface="+mn-cs"/>
-              </a:defRPr>
-            </a:lvl4pPr>
-            <a:lvl5pPr marL="1828800" indent="0" algn="ctr" defTabSz="914400" rtl="0" eaLnBrk="1" latinLnBrk="1" hangingPunct="1">
-              <a:lnSpc>
-                <a:spcPct val="90000"/>
-              </a:lnSpc>
-              <a:spcBef>
-                <a:spcPts val="500"/>
-              </a:spcBef>
-              <a:buFont typeface="Arial" panose="020B0604020202020204" pitchFamily="34" charset="0"/>
-              <a:buNone/>
-              <a:defRPr sz="1600" kern="1200">
-                <a:solidFill>
-                  <a:schemeClr val="tx1"/>
-                </a:solidFill>
-                <a:latin typeface="+mn-lt"/>
-                <a:ea typeface="+mn-ea"/>
-                <a:cs typeface="+mn-cs"/>
-              </a:defRPr>
-            </a:lvl5pPr>
-            <a:lvl6pPr marL="2286000" indent="0" algn="ctr" defTabSz="914400" rtl="0" eaLnBrk="1" latinLnBrk="1" hangingPunct="1">
-              <a:lnSpc>
-                <a:spcPct val="90000"/>
-              </a:lnSpc>
-              <a:spcBef>
-                <a:spcPts val="500"/>
-              </a:spcBef>
-              <a:buFont typeface="Arial" panose="020B0604020202020204" pitchFamily="34" charset="0"/>
-              <a:buNone/>
-              <a:defRPr sz="1600" kern="1200">
-                <a:solidFill>
-                  <a:schemeClr val="tx1"/>
-                </a:solidFill>
-                <a:latin typeface="+mn-lt"/>
-                <a:ea typeface="+mn-ea"/>
-                <a:cs typeface="+mn-cs"/>
-              </a:defRPr>
-            </a:lvl6pPr>
-            <a:lvl7pPr marL="2743200" indent="0" algn="ctr" defTabSz="914400" rtl="0" eaLnBrk="1" latinLnBrk="1" hangingPunct="1">
-              <a:lnSpc>
-                <a:spcPct val="90000"/>
-              </a:lnSpc>
-              <a:spcBef>
-                <a:spcPts val="500"/>
-              </a:spcBef>
-              <a:buFont typeface="Arial" panose="020B0604020202020204" pitchFamily="34" charset="0"/>
-              <a:buNone/>
-              <a:defRPr sz="1600" kern="1200">
-                <a:solidFill>
-                  <a:schemeClr val="tx1"/>
-                </a:solidFill>
-                <a:latin typeface="+mn-lt"/>
-                <a:ea typeface="+mn-ea"/>
-                <a:cs typeface="+mn-cs"/>
-              </a:defRPr>
-            </a:lvl7pPr>
-            <a:lvl8pPr marL="3200400" indent="0" algn="ctr" defTabSz="914400" rtl="0" eaLnBrk="1" latinLnBrk="1" hangingPunct="1">
-              <a:lnSpc>
-                <a:spcPct val="90000"/>
-              </a:lnSpc>
-              <a:spcBef>
-                <a:spcPts val="500"/>
-              </a:spcBef>
-              <a:buFont typeface="Arial" panose="020B0604020202020204" pitchFamily="34" charset="0"/>
-              <a:buNone/>
-              <a:defRPr sz="1600" kern="1200">
-                <a:solidFill>
-                  <a:schemeClr val="tx1"/>
-                </a:solidFill>
-                <a:latin typeface="+mn-lt"/>
-                <a:ea typeface="+mn-ea"/>
-                <a:cs typeface="+mn-cs"/>
-              </a:defRPr>
-            </a:lvl8pPr>
-            <a:lvl9pPr marL="3657600" indent="0" algn="ctr" defTabSz="914400" rtl="0" eaLnBrk="1" latinLnBrk="1" hangingPunct="1">
-              <a:lnSpc>
-                <a:spcPct val="90000"/>
-              </a:lnSpc>
-              <a:spcBef>
-                <a:spcPts val="500"/>
-              </a:spcBef>
-              <a:buFont typeface="Arial" panose="020B0604020202020204" pitchFamily="34" charset="0"/>
-              <a:buNone/>
-              <a:defRPr sz="1600" kern="1200">
-                <a:solidFill>
-                  <a:schemeClr val="tx1"/>
-                </a:solidFill>
-                <a:latin typeface="+mn-lt"/>
-                <a:ea typeface="+mn-ea"/>
-                <a:cs typeface="+mn-cs"/>
-              </a:defRPr>
-            </a:lvl9pPr>
-          </a:lstStyle>
-          <a:p>
-            <a:pPr algn="l">
-              <a:lnSpc>
-                <a:spcPct val="150000"/>
-              </a:lnSpc>
-            </a:pPr>
+          <a:lstStyle/>
+          <a:p>
             <a:r>
-              <a:rPr lang="ko-KR" altLang="en-US" sz="1200" b="1" dirty="0">
-                <a:latin typeface="+mj-lt"/>
-              </a:rPr>
-              <a:t>설계 설명</a:t>
+              <a:rPr lang="en-US" altLang="ko-KR" sz="800" b="1" dirty="0"/>
+              <a:t>1</a:t>
             </a:r>
-            <a:endParaRPr lang="en-US" altLang="ko-KR" sz="1200" b="1" dirty="0">
-              <a:latin typeface="+mj-lt"/>
-            </a:endParaRPr>
-          </a:p>
-          <a:p>
-            <a:pPr marL="171450" indent="-171450" algn="l">
-              <a:lnSpc>
-                <a:spcPct val="150000"/>
-              </a:lnSpc>
-              <a:buFont typeface="Wingdings" panose="05000000000000000000" pitchFamily="2" charset="2"/>
-              <a:buChar char="u"/>
-            </a:pPr>
+            <a:endParaRPr lang="ko-KR" altLang="en-US" sz="800" b="1" dirty="0"/>
+          </a:p>
+        </p:txBody>
+      </p:sp>
+      <p:sp>
+        <p:nvSpPr>
+          <p:cNvPr id="54" name="TextBox 53">
+            <a:extLst>
+              <a:ext uri="{FF2B5EF4-FFF2-40B4-BE49-F238E27FC236}">
+                <a16:creationId xmlns:a16="http://schemas.microsoft.com/office/drawing/2014/main" id="{158DA3E3-818A-4997-BF21-C4EE321CD3C2}"/>
+              </a:ext>
+            </a:extLst>
+          </p:cNvPr>
+          <p:cNvSpPr txBox="1"/>
+          <p:nvPr/>
+        </p:nvSpPr>
+        <p:spPr>
+          <a:xfrm flipH="1">
+            <a:off x="4972559" y="5131068"/>
+            <a:ext cx="194730" cy="215444"/>
+          </a:xfrm>
+          <a:prstGeom prst="rect">
+            <a:avLst/>
+          </a:prstGeom>
+          <a:noFill/>
+        </p:spPr>
+        <p:txBody>
+          <a:bodyPr wrap="square" rtlCol="0">
+            <a:spAutoFit/>
+          </a:bodyPr>
+          <a:lstStyle/>
+          <a:p>
             <a:r>
-              <a:rPr lang="en-US" altLang="ko-KR" sz="1000" dirty="0"/>
-              <a:t>HEALTH_DIAGNOSE </a:t>
+              <a:rPr lang="en-US" altLang="ko-KR" sz="800" b="1" dirty="0"/>
+              <a:t>N</a:t>
             </a:r>
-            <a:r>
-              <a:rPr lang="ko-KR" altLang="en-US" sz="1000" dirty="0"/>
-              <a:t>테이블은 회원 별 건강검진 데이터 및 생활습관 정보를 저장합니다</a:t>
-            </a:r>
-            <a:r>
-              <a:rPr lang="en-US" altLang="ko-KR" sz="1000" dirty="0"/>
-              <a:t>.</a:t>
-            </a:r>
-          </a:p>
-          <a:p>
-            <a:pPr marL="171450" indent="-171450" algn="l">
-              <a:lnSpc>
-                <a:spcPct val="150000"/>
-              </a:lnSpc>
-              <a:buFont typeface="Wingdings" panose="05000000000000000000" pitchFamily="2" charset="2"/>
-              <a:buChar char="u"/>
-            </a:pPr>
-            <a:r>
-              <a:rPr lang="ko-KR" altLang="en-US" sz="1000" dirty="0"/>
-              <a:t>회원 한명은 여러 개의 건강검진 데이터를 가질 수 있습니다</a:t>
-            </a:r>
-            <a:r>
-              <a:rPr lang="en-US" altLang="ko-KR" sz="1000" dirty="0"/>
-              <a:t>.</a:t>
-            </a:r>
-            <a:br>
-              <a:rPr lang="en-US" altLang="ko-KR" sz="1000" dirty="0"/>
-            </a:br>
-            <a:r>
-              <a:rPr lang="en-US" altLang="ko-KR" sz="1000" dirty="0"/>
-              <a:t>(MEMBER ↔ HEALTH_DIAGNOSE : 1 : N </a:t>
-            </a:r>
-            <a:r>
-              <a:rPr lang="ko-KR" altLang="en-US" sz="1000" dirty="0"/>
-              <a:t>관계</a:t>
-            </a:r>
-            <a:r>
-              <a:rPr lang="en-US" altLang="ko-KR" sz="1000" dirty="0"/>
-              <a:t>)</a:t>
-            </a:r>
-          </a:p>
-          <a:p>
-            <a:pPr marL="171450" indent="-171450" algn="l">
-              <a:lnSpc>
-                <a:spcPct val="150000"/>
-              </a:lnSpc>
-              <a:buFont typeface="Wingdings" panose="05000000000000000000" pitchFamily="2" charset="2"/>
-              <a:buChar char="u"/>
-            </a:pPr>
-            <a:r>
-              <a:rPr lang="en-US" altLang="ko-KR" sz="1000" dirty="0"/>
-              <a:t>COMMUNITY </a:t>
-            </a:r>
-            <a:r>
-              <a:rPr lang="ko-KR" altLang="en-US" sz="1000" dirty="0"/>
-              <a:t>테이블은 회원이 작성한 게시글 정보를 저장합니다</a:t>
-            </a:r>
-            <a:r>
-              <a:rPr lang="en-US" altLang="ko-KR" sz="1000" dirty="0"/>
-              <a:t>.</a:t>
-            </a:r>
-            <a:br>
-              <a:rPr lang="en-US" altLang="ko-KR" sz="1000" dirty="0"/>
-            </a:br>
-            <a:r>
-              <a:rPr lang="ko-KR" altLang="en-US" sz="1000" dirty="0"/>
-              <a:t>회원 한명은 여러 개의 게시글을 작성할 수 있습니다</a:t>
-            </a:r>
-            <a:r>
-              <a:rPr lang="en-US" altLang="ko-KR" sz="1000" dirty="0"/>
-              <a:t>.</a:t>
-            </a:r>
-            <a:br>
-              <a:rPr lang="en-US" altLang="ko-KR" sz="1000" dirty="0"/>
-            </a:br>
-            <a:r>
-              <a:rPr lang="en-US" altLang="ko-KR" sz="1000" dirty="0"/>
-              <a:t>(MEMBER ↔ COMMUNITY : 1 : N </a:t>
-            </a:r>
-            <a:r>
-              <a:rPr lang="ko-KR" altLang="en-US" sz="1000" dirty="0"/>
-              <a:t>관계</a:t>
-            </a:r>
-            <a:r>
-              <a:rPr lang="en-US" altLang="ko-KR" sz="1000" dirty="0"/>
-              <a:t>)</a:t>
-            </a:r>
-          </a:p>
-          <a:p>
-            <a:pPr marL="171450" indent="-171450" algn="l">
-              <a:lnSpc>
-                <a:spcPct val="150000"/>
-              </a:lnSpc>
-              <a:buFont typeface="Wingdings" panose="05000000000000000000" pitchFamily="2" charset="2"/>
-              <a:buChar char="u"/>
-            </a:pPr>
-            <a:r>
-              <a:rPr lang="ko-KR" altLang="en-US" sz="1000" dirty="0"/>
-              <a:t>본 시스템은 건강검진 데이터와 커뮤니티 기능을 통합하여</a:t>
-            </a:r>
-            <a:br>
-              <a:rPr lang="ko-KR" altLang="en-US" sz="1000" dirty="0"/>
-            </a:br>
-            <a:r>
-              <a:rPr lang="ko-KR" altLang="en-US" sz="1000" dirty="0"/>
-              <a:t>사용자 간 건강 정보 공유 및 소통 기능을 제공합니다</a:t>
-            </a:r>
-            <a:r>
-              <a:rPr lang="en-US" altLang="ko-KR" sz="1000" dirty="0"/>
-              <a:t>.</a:t>
-            </a:r>
-            <a:endParaRPr lang="en-US" altLang="ko-KR" sz="1000" dirty="0">
-              <a:latin typeface="+mj-lt"/>
-            </a:endParaRPr>
+            <a:endParaRPr lang="ko-KR" altLang="en-US" sz="800" b="1" dirty="0"/>
           </a:p>
         </p:txBody>
       </p:sp>
     </p:spTree>
     <p:extLst>
       <p:ext uri="{BB962C8B-B14F-4D97-AF65-F5344CB8AC3E}">
-        <p14:creationId xmlns:p14="http://schemas.microsoft.com/office/powerpoint/2010/main" val="1984464795"/>
+        <p14:creationId xmlns:p14="http://schemas.microsoft.com/office/powerpoint/2010/main" val="3690327821"/>
       </p:ext>
     </p:extLst>
   </p:cSld>

--- a/DB산출물/05_ERD.pptx
+++ b/DB산출물/05_ERD.pptx
@@ -259,7 +259,7 @@
           <a:p>
             <a:fld id="{C6EE36B7-F0BA-4AB3-BD67-20AC5E002CC9}" type="datetimeFigureOut">
               <a:rPr lang="ko-KR" altLang="en-US" smtClean="0"/>
-              <a:t>2026-05-18</a:t>
+              <a:t>2026-05-19</a:t>
             </a:fld>
             <a:endParaRPr lang="ko-KR" altLang="en-US"/>
           </a:p>
@@ -457,7 +457,7 @@
           <a:p>
             <a:fld id="{C6EE36B7-F0BA-4AB3-BD67-20AC5E002CC9}" type="datetimeFigureOut">
               <a:rPr lang="ko-KR" altLang="en-US" smtClean="0"/>
-              <a:t>2026-05-18</a:t>
+              <a:t>2026-05-19</a:t>
             </a:fld>
             <a:endParaRPr lang="ko-KR" altLang="en-US"/>
           </a:p>
@@ -665,7 +665,7 @@
           <a:p>
             <a:fld id="{C6EE36B7-F0BA-4AB3-BD67-20AC5E002CC9}" type="datetimeFigureOut">
               <a:rPr lang="ko-KR" altLang="en-US" smtClean="0"/>
-              <a:t>2026-05-18</a:t>
+              <a:t>2026-05-19</a:t>
             </a:fld>
             <a:endParaRPr lang="ko-KR" altLang="en-US"/>
           </a:p>
@@ -863,7 +863,7 @@
           <a:p>
             <a:fld id="{C6EE36B7-F0BA-4AB3-BD67-20AC5E002CC9}" type="datetimeFigureOut">
               <a:rPr lang="ko-KR" altLang="en-US" smtClean="0"/>
-              <a:t>2026-05-18</a:t>
+              <a:t>2026-05-19</a:t>
             </a:fld>
             <a:endParaRPr lang="ko-KR" altLang="en-US"/>
           </a:p>
@@ -1138,7 +1138,7 @@
           <a:p>
             <a:fld id="{C6EE36B7-F0BA-4AB3-BD67-20AC5E002CC9}" type="datetimeFigureOut">
               <a:rPr lang="ko-KR" altLang="en-US" smtClean="0"/>
-              <a:t>2026-05-18</a:t>
+              <a:t>2026-05-19</a:t>
             </a:fld>
             <a:endParaRPr lang="ko-KR" altLang="en-US"/>
           </a:p>
@@ -1403,7 +1403,7 @@
           <a:p>
             <a:fld id="{C6EE36B7-F0BA-4AB3-BD67-20AC5E002CC9}" type="datetimeFigureOut">
               <a:rPr lang="ko-KR" altLang="en-US" smtClean="0"/>
-              <a:t>2026-05-18</a:t>
+              <a:t>2026-05-19</a:t>
             </a:fld>
             <a:endParaRPr lang="ko-KR" altLang="en-US"/>
           </a:p>
@@ -1815,7 +1815,7 @@
           <a:p>
             <a:fld id="{C6EE36B7-F0BA-4AB3-BD67-20AC5E002CC9}" type="datetimeFigureOut">
               <a:rPr lang="ko-KR" altLang="en-US" smtClean="0"/>
-              <a:t>2026-05-18</a:t>
+              <a:t>2026-05-19</a:t>
             </a:fld>
             <a:endParaRPr lang="ko-KR" altLang="en-US"/>
           </a:p>
@@ -1956,7 +1956,7 @@
           <a:p>
             <a:fld id="{C6EE36B7-F0BA-4AB3-BD67-20AC5E002CC9}" type="datetimeFigureOut">
               <a:rPr lang="ko-KR" altLang="en-US" smtClean="0"/>
-              <a:t>2026-05-18</a:t>
+              <a:t>2026-05-19</a:t>
             </a:fld>
             <a:endParaRPr lang="ko-KR" altLang="en-US"/>
           </a:p>
@@ -2069,7 +2069,7 @@
           <a:p>
             <a:fld id="{C6EE36B7-F0BA-4AB3-BD67-20AC5E002CC9}" type="datetimeFigureOut">
               <a:rPr lang="ko-KR" altLang="en-US" smtClean="0"/>
-              <a:t>2026-05-18</a:t>
+              <a:t>2026-05-19</a:t>
             </a:fld>
             <a:endParaRPr lang="ko-KR" altLang="en-US"/>
           </a:p>
@@ -2380,7 +2380,7 @@
           <a:p>
             <a:fld id="{C6EE36B7-F0BA-4AB3-BD67-20AC5E002CC9}" type="datetimeFigureOut">
               <a:rPr lang="ko-KR" altLang="en-US" smtClean="0"/>
-              <a:t>2026-05-18</a:t>
+              <a:t>2026-05-19</a:t>
             </a:fld>
             <a:endParaRPr lang="ko-KR" altLang="en-US"/>
           </a:p>
@@ -2668,7 +2668,7 @@
           <a:p>
             <a:fld id="{C6EE36B7-F0BA-4AB3-BD67-20AC5E002CC9}" type="datetimeFigureOut">
               <a:rPr lang="ko-KR" altLang="en-US" smtClean="0"/>
-              <a:t>2026-05-18</a:t>
+              <a:t>2026-05-19</a:t>
             </a:fld>
             <a:endParaRPr lang="ko-KR" altLang="en-US"/>
           </a:p>
@@ -2909,7 +2909,7 @@
           <a:p>
             <a:fld id="{C6EE36B7-F0BA-4AB3-BD67-20AC5E002CC9}" type="datetimeFigureOut">
               <a:rPr lang="ko-KR" altLang="en-US" smtClean="0"/>
-              <a:t>2026-05-18</a:t>
+              <a:t>2026-05-19</a:t>
             </a:fld>
             <a:endParaRPr lang="ko-KR" altLang="en-US"/>
           </a:p>
@@ -3435,7 +3435,7 @@
           <p:nvPr>
             <p:extLst>
               <p:ext uri="{D42A27DB-BD31-4B8C-83A1-F6EECF244321}">
-                <p14:modId xmlns:p14="http://schemas.microsoft.com/office/powerpoint/2010/main" val="179873269"/>
+                <p14:modId xmlns:p14="http://schemas.microsoft.com/office/powerpoint/2010/main" val="2479024325"/>
               </p:ext>
             </p:extLst>
           </p:nvPr>
@@ -3625,7 +3625,7 @@
                         <a:rPr lang="en-US" altLang="ko-KR" sz="800" dirty="0">
                           <a:latin typeface="+mj-lt"/>
                         </a:rPr>
-                        <a:t>varchar2(15)</a:t>
+                        <a:t>varchar2(50)</a:t>
                       </a:r>
                     </a:p>
                   </a:txBody>
@@ -3893,7 +3893,7 @@
           <p:nvPr>
             <p:extLst>
               <p:ext uri="{D42A27DB-BD31-4B8C-83A1-F6EECF244321}">
-                <p14:modId xmlns:p14="http://schemas.microsoft.com/office/powerpoint/2010/main" val="548430906"/>
+                <p14:modId xmlns:p14="http://schemas.microsoft.com/office/powerpoint/2010/main" val="228364415"/>
               </p:ext>
             </p:extLst>
           </p:nvPr>
@@ -5631,7 +5631,7 @@
                         <a:defRPr/>
                       </a:pPr>
                       <a:r>
-                        <a:rPr lang="en-US" altLang="ko-KR" sz="1000" kern="1200" dirty="0">
+                        <a:rPr lang="en-US" altLang="ko-KR" sz="1000" kern="1200">
                           <a:solidFill>
                             <a:schemeClr val="dk1"/>
                           </a:solidFill>
@@ -5639,7 +5639,7 @@
                           <a:ea typeface="+mn-ea"/>
                           <a:cs typeface="+mn-cs"/>
                         </a:rPr>
-                        <a:t>varchar(10)</a:t>
+                        <a:t>NUMBER(3)</a:t>
                       </a:r>
                       <a:endParaRPr lang="ko-KR" altLang="en-US" sz="1000" kern="1200" dirty="0">
                         <a:solidFill>
@@ -6283,7 +6283,7 @@
           <p:nvPr>
             <p:extLst>
               <p:ext uri="{D42A27DB-BD31-4B8C-83A1-F6EECF244321}">
-                <p14:modId xmlns:p14="http://schemas.microsoft.com/office/powerpoint/2010/main" val="1455491900"/>
+                <p14:modId xmlns:p14="http://schemas.microsoft.com/office/powerpoint/2010/main" val="3820916366"/>
               </p:ext>
             </p:extLst>
           </p:nvPr>
@@ -6490,8 +6490,8 @@
                     <a:p>
                       <a:pPr algn="ctr" latinLnBrk="1"/>
                       <a:r>
-                        <a:rPr lang="en-US" altLang="ko-KR" sz="800" dirty="0"/>
-                        <a:t>VARCHAR2(15)</a:t>
+                        <a:rPr lang="en-US" altLang="ko-KR" sz="800"/>
+                        <a:t>VARCHAR2(50)</a:t>
                       </a:r>
                       <a:endParaRPr lang="ko-KR" altLang="en-US" sz="800" dirty="0"/>
                     </a:p>

--- a/DB산출물/05_ERD.pptx
+++ b/DB산출물/05_ERD.pptx
@@ -259,7 +259,7 @@
           <a:p>
             <a:fld id="{C6EE36B7-F0BA-4AB3-BD67-20AC5E002CC9}" type="datetimeFigureOut">
               <a:rPr lang="ko-KR" altLang="en-US" smtClean="0"/>
-              <a:t>2026-05-19</a:t>
+              <a:t>2026-05-20</a:t>
             </a:fld>
             <a:endParaRPr lang="ko-KR" altLang="en-US"/>
           </a:p>
@@ -457,7 +457,7 @@
           <a:p>
             <a:fld id="{C6EE36B7-F0BA-4AB3-BD67-20AC5E002CC9}" type="datetimeFigureOut">
               <a:rPr lang="ko-KR" altLang="en-US" smtClean="0"/>
-              <a:t>2026-05-19</a:t>
+              <a:t>2026-05-20</a:t>
             </a:fld>
             <a:endParaRPr lang="ko-KR" altLang="en-US"/>
           </a:p>
@@ -665,7 +665,7 @@
           <a:p>
             <a:fld id="{C6EE36B7-F0BA-4AB3-BD67-20AC5E002CC9}" type="datetimeFigureOut">
               <a:rPr lang="ko-KR" altLang="en-US" smtClean="0"/>
-              <a:t>2026-05-19</a:t>
+              <a:t>2026-05-20</a:t>
             </a:fld>
             <a:endParaRPr lang="ko-KR" altLang="en-US"/>
           </a:p>
@@ -863,7 +863,7 @@
           <a:p>
             <a:fld id="{C6EE36B7-F0BA-4AB3-BD67-20AC5E002CC9}" type="datetimeFigureOut">
               <a:rPr lang="ko-KR" altLang="en-US" smtClean="0"/>
-              <a:t>2026-05-19</a:t>
+              <a:t>2026-05-20</a:t>
             </a:fld>
             <a:endParaRPr lang="ko-KR" altLang="en-US"/>
           </a:p>
@@ -1138,7 +1138,7 @@
           <a:p>
             <a:fld id="{C6EE36B7-F0BA-4AB3-BD67-20AC5E002CC9}" type="datetimeFigureOut">
               <a:rPr lang="ko-KR" altLang="en-US" smtClean="0"/>
-              <a:t>2026-05-19</a:t>
+              <a:t>2026-05-20</a:t>
             </a:fld>
             <a:endParaRPr lang="ko-KR" altLang="en-US"/>
           </a:p>
@@ -1403,7 +1403,7 @@
           <a:p>
             <a:fld id="{C6EE36B7-F0BA-4AB3-BD67-20AC5E002CC9}" type="datetimeFigureOut">
               <a:rPr lang="ko-KR" altLang="en-US" smtClean="0"/>
-              <a:t>2026-05-19</a:t>
+              <a:t>2026-05-20</a:t>
             </a:fld>
             <a:endParaRPr lang="ko-KR" altLang="en-US"/>
           </a:p>
@@ -1815,7 +1815,7 @@
           <a:p>
             <a:fld id="{C6EE36B7-F0BA-4AB3-BD67-20AC5E002CC9}" type="datetimeFigureOut">
               <a:rPr lang="ko-KR" altLang="en-US" smtClean="0"/>
-              <a:t>2026-05-19</a:t>
+              <a:t>2026-05-20</a:t>
             </a:fld>
             <a:endParaRPr lang="ko-KR" altLang="en-US"/>
           </a:p>
@@ -1956,7 +1956,7 @@
           <a:p>
             <a:fld id="{C6EE36B7-F0BA-4AB3-BD67-20AC5E002CC9}" type="datetimeFigureOut">
               <a:rPr lang="ko-KR" altLang="en-US" smtClean="0"/>
-              <a:t>2026-05-19</a:t>
+              <a:t>2026-05-20</a:t>
             </a:fld>
             <a:endParaRPr lang="ko-KR" altLang="en-US"/>
           </a:p>
@@ -2069,7 +2069,7 @@
           <a:p>
             <a:fld id="{C6EE36B7-F0BA-4AB3-BD67-20AC5E002CC9}" type="datetimeFigureOut">
               <a:rPr lang="ko-KR" altLang="en-US" smtClean="0"/>
-              <a:t>2026-05-19</a:t>
+              <a:t>2026-05-20</a:t>
             </a:fld>
             <a:endParaRPr lang="ko-KR" altLang="en-US"/>
           </a:p>
@@ -2380,7 +2380,7 @@
           <a:p>
             <a:fld id="{C6EE36B7-F0BA-4AB3-BD67-20AC5E002CC9}" type="datetimeFigureOut">
               <a:rPr lang="ko-KR" altLang="en-US" smtClean="0"/>
-              <a:t>2026-05-19</a:t>
+              <a:t>2026-05-20</a:t>
             </a:fld>
             <a:endParaRPr lang="ko-KR" altLang="en-US"/>
           </a:p>
@@ -2668,7 +2668,7 @@
           <a:p>
             <a:fld id="{C6EE36B7-F0BA-4AB3-BD67-20AC5E002CC9}" type="datetimeFigureOut">
               <a:rPr lang="ko-KR" altLang="en-US" smtClean="0"/>
-              <a:t>2026-05-19</a:t>
+              <a:t>2026-05-20</a:t>
             </a:fld>
             <a:endParaRPr lang="ko-KR" altLang="en-US"/>
           </a:p>
@@ -2909,7 +2909,7 @@
           <a:p>
             <a:fld id="{C6EE36B7-F0BA-4AB3-BD67-20AC5E002CC9}" type="datetimeFigureOut">
               <a:rPr lang="ko-KR" altLang="en-US" smtClean="0"/>
-              <a:t>2026-05-19</a:t>
+              <a:t>2026-05-20</a:t>
             </a:fld>
             <a:endParaRPr lang="ko-KR" altLang="en-US"/>
           </a:p>
@@ -6283,14 +6283,14 @@
           <p:nvPr>
             <p:extLst>
               <p:ext uri="{D42A27DB-BD31-4B8C-83A1-F6EECF244321}">
-                <p14:modId xmlns:p14="http://schemas.microsoft.com/office/powerpoint/2010/main" val="3820916366"/>
+                <p14:modId xmlns:p14="http://schemas.microsoft.com/office/powerpoint/2010/main" val="2462397300"/>
               </p:ext>
             </p:extLst>
           </p:nvPr>
         </p:nvGraphicFramePr>
         <p:xfrm>
           <a:off x="506428" y="2436322"/>
-          <a:ext cx="4384656" cy="1950720"/>
+          <a:ext cx="4384656" cy="2164080"/>
         </p:xfrm>
         <a:graphic>
           <a:graphicData uri="http://schemas.openxmlformats.org/drawingml/2006/table">
@@ -6523,7 +6523,7 @@
                   </a:ext>
                 </a:extLst>
               </a:tr>
-              <a:tr h="147441">
+              <a:tr h="178306">
                 <a:tc>
                   <a:txBody>
                     <a:bodyPr/>
@@ -6622,6 +6622,72 @@
                 <a:extLst>
                   <a:ext uri="{0D108BD9-81ED-4DB2-BD59-A6C34878D82A}">
                     <a16:rowId xmlns:a16="http://schemas.microsoft.com/office/drawing/2014/main" val="2480367533"/>
+                  </a:ext>
+                </a:extLst>
+              </a:tr>
+              <a:tr h="147441">
+                <a:tc>
+                  <a:txBody>
+                    <a:bodyPr/>
+                    <a:lstStyle/>
+                    <a:p>
+                      <a:pPr algn="ctr" latinLnBrk="1"/>
+                      <a:r>
+                        <a:rPr lang="en-US" altLang="ko-KR" sz="800" dirty="0"/>
+                        <a:t>COM_CATEGORY</a:t>
+                      </a:r>
+                      <a:endParaRPr lang="ko-KR" altLang="en-US" sz="800" dirty="0"/>
+                    </a:p>
+                  </a:txBody>
+                  <a:tcPr/>
+                </a:tc>
+                <a:tc>
+                  <a:txBody>
+                    <a:bodyPr/>
+                    <a:lstStyle/>
+                    <a:p>
+                      <a:pPr marL="0" marR="0" lvl="0" indent="0" algn="ctr" defTabSz="914400" rtl="0" eaLnBrk="1" fontAlgn="auto" latinLnBrk="1" hangingPunct="1">
+                        <a:lnSpc>
+                          <a:spcPct val="100000"/>
+                        </a:lnSpc>
+                        <a:spcBef>
+                          <a:spcPts val="0"/>
+                        </a:spcBef>
+                        <a:spcAft>
+                          <a:spcPts val="0"/>
+                        </a:spcAft>
+                        <a:buClrTx/>
+                        <a:buSzTx/>
+                        <a:buFontTx/>
+                        <a:buNone/>
+                        <a:tabLst/>
+                        <a:defRPr/>
+                      </a:pPr>
+                      <a:r>
+                        <a:rPr lang="en-US" altLang="ko-KR" sz="800" dirty="0"/>
+                        <a:t>VARCHAR2(50)</a:t>
+                      </a:r>
+                    </a:p>
+                  </a:txBody>
+                  <a:tcPr/>
+                </a:tc>
+                <a:tc>
+                  <a:txBody>
+                    <a:bodyPr/>
+                    <a:lstStyle/>
+                    <a:p>
+                      <a:pPr algn="ctr" latinLnBrk="1"/>
+                      <a:r>
+                        <a:rPr lang="ko-KR" altLang="en-US" sz="800" dirty="0"/>
+                        <a:t>카테고리</a:t>
+                      </a:r>
+                    </a:p>
+                  </a:txBody>
+                  <a:tcPr/>
+                </a:tc>
+                <a:extLst>
+                  <a:ext uri="{0D108BD9-81ED-4DB2-BD59-A6C34878D82A}">
+                    <a16:rowId xmlns:a16="http://schemas.microsoft.com/office/drawing/2014/main" val="4204601710"/>
                   </a:ext>
                 </a:extLst>
               </a:tr>
@@ -7172,13 +7238,13 @@
           <p:nvPr>
             <p:extLst>
               <p:ext uri="{D42A27DB-BD31-4B8C-83A1-F6EECF244321}">
-                <p14:modId xmlns:p14="http://schemas.microsoft.com/office/powerpoint/2010/main" val="2694325727"/>
+                <p14:modId xmlns:p14="http://schemas.microsoft.com/office/powerpoint/2010/main" val="140314679"/>
               </p:ext>
             </p:extLst>
           </p:nvPr>
         </p:nvGraphicFramePr>
         <p:xfrm>
-          <a:off x="506428" y="4664366"/>
+          <a:off x="506428" y="4842168"/>
           <a:ext cx="4384656" cy="1280160"/>
         </p:xfrm>
         <a:graphic>
@@ -7626,13 +7692,15 @@
               </a:ext>
             </a:extLst>
           </p:cNvPr>
-          <p:cNvCxnSpPr/>
+          <p:cNvCxnSpPr>
+            <a:cxnSpLocks/>
+          </p:cNvCxnSpPr>
           <p:nvPr/>
         </p:nvCxnSpPr>
         <p:spPr>
           <a:xfrm>
             <a:off x="5579534" y="913474"/>
-            <a:ext cx="0" cy="4390972"/>
+            <a:ext cx="0" cy="4687304"/>
           </a:xfrm>
           <a:prstGeom prst="line">
             <a:avLst/>
@@ -7669,7 +7737,7 @@
         </p:nvCxnSpPr>
         <p:spPr>
           <a:xfrm>
-            <a:off x="5033431" y="5304446"/>
+            <a:off x="5033431" y="5600778"/>
             <a:ext cx="546103" cy="0"/>
           </a:xfrm>
           <a:prstGeom prst="line">
@@ -7707,7 +7775,7 @@
         </p:nvCxnSpPr>
         <p:spPr>
           <a:xfrm flipH="1" flipV="1">
-            <a:off x="4902118" y="5173133"/>
+            <a:off x="4902118" y="5469465"/>
             <a:ext cx="131314" cy="131314"/>
           </a:xfrm>
           <a:prstGeom prst="line">
@@ -7745,7 +7813,7 @@
         </p:nvCxnSpPr>
         <p:spPr>
           <a:xfrm flipH="1">
-            <a:off x="4902117" y="5304446"/>
+            <a:off x="4902117" y="5600778"/>
             <a:ext cx="131315" cy="131314"/>
           </a:xfrm>
           <a:prstGeom prst="line">
@@ -7817,7 +7885,7 @@
         </p:nvSpPr>
         <p:spPr>
           <a:xfrm flipH="1">
-            <a:off x="4972559" y="5131068"/>
+            <a:off x="4972559" y="5427400"/>
             <a:ext cx="194730" cy="215444"/>
           </a:xfrm>
           <a:prstGeom prst="rect">
